--- a/submission4/BICS2304_04_Jupiter_WearableHeatStrokePreventionSystem_4.pptx
+++ b/submission4/BICS2304_04_Jupiter_WearableHeatStrokePreventionSystem_4.pptx
@@ -12,9 +12,11 @@
     <p:sldId id="260" r:id="rId6"/>
     <p:sldId id="261" r:id="rId7"/>
     <p:sldId id="262" r:id="rId8"/>
+    <p:sldId id="263" r:id="rId9"/>
+    <p:sldId id="264" r:id="rId10"/>
   </p:sldIdLst>
   <p:notesMasterIdLst>
-    <p:notesMasterId r:id="rId9"/>
+    <p:notesMasterId r:id="rId11"/>
   </p:notesMasterIdLst>
   <p:sldSz cx="9144000" cy="5143500"/>
   <p:notesSz cx="5143500" cy="9144000"/>
@@ -1060,6 +1062,182 @@
             <a:fld id="{F7021451-1387-4CA6-816F-3879F97B5CBC}" type="slidenum">
               <a:rPr lang="en-US"/>
               <a:t>7</a:t>
+            </a:fld>
+            <a:endParaRPr lang="en-US"/>
+          </a:p>
+        </p:txBody>
+      </p:sp>
+    </p:spTree>
+    <p:extLst>
+      <p:ext uri="{BB962C8B-B14F-4D97-AF65-F5344CB8AC3E}">
+        <p14:creationId xmlns:p14="http://schemas.microsoft.com/office/powerpoint/2010/main" val="1024086991"/>
+      </p:ext>
+    </p:extLst>
+  </p:cSld>
+  <p:clrMapOvr>
+    <a:masterClrMapping/>
+  </p:clrMapOvr>
+</p:notes>
+</file>
+
+<file path=ppt/notesSlides/notesSlide8.xml><?xml version="1.0" encoding="utf-8"?>
+<p:notes xmlns:a="http://schemas.openxmlformats.org/drawingml/2006/main" xmlns:r="http://schemas.openxmlformats.org/officeDocument/2006/relationships" xmlns:p="http://schemas.openxmlformats.org/presentationml/2006/main">
+  <p:cSld>
+    <p:spTree>
+      <p:nvGrpSpPr>
+        <p:cNvPr id="1" name=""/>
+        <p:cNvGrpSpPr/>
+        <p:nvPr/>
+      </p:nvGrpSpPr>
+      <p:grpSpPr>
+        <a:xfrm>
+          <a:off x="0" y="0"/>
+          <a:ext cx="0" cy="0"/>
+          <a:chOff x="0" y="0"/>
+          <a:chExt cx="0" cy="0"/>
+        </a:xfrm>
+      </p:grpSpPr>
+      <p:sp>
+        <p:nvSpPr>
+          <p:cNvPr id="2" name="Slide Image Placeholder 1"/>
+          <p:cNvSpPr>
+            <a:spLocks noGrp="1" noRot="1" noChangeAspect="1"/>
+          </p:cNvSpPr>
+          <p:nvPr>
+            <p:ph type="sldImg"/>
+          </p:nvPr>
+        </p:nvSpPr>
+        <p:spPr/>
+      </p:sp>
+      <p:sp>
+        <p:nvSpPr>
+          <p:cNvPr id="3" name="Notes Placeholder 2"/>
+          <p:cNvSpPr>
+            <a:spLocks noGrp="1"/>
+          </p:cNvSpPr>
+          <p:nvPr>
+            <p:ph type="body" idx="1"/>
+          </p:nvPr>
+        </p:nvSpPr>
+        <p:spPr/>
+        <p:txBody>
+          <a:bodyPr/>
+          <a:lstStyle/>
+          <a:p>
+            <a:r>
+              <a:rPr lang="en-US" dirty="0"/>
+              <a:t/>
+            </a:r>
+            <a:endParaRPr lang="en-US" dirty="0"/>
+          </a:p>
+        </p:txBody>
+      </p:sp>
+      <p:sp>
+        <p:nvSpPr>
+          <p:cNvPr id="4" name="Slide Number Placeholder 3"/>
+          <p:cNvSpPr>
+            <a:spLocks noGrp="1"/>
+          </p:cNvSpPr>
+          <p:nvPr>
+            <p:ph type="sldNum" sz="quarter" idx="10"/>
+          </p:nvPr>
+        </p:nvSpPr>
+        <p:spPr/>
+        <p:txBody>
+          <a:bodyPr/>
+          <a:lstStyle/>
+          <a:p>
+            <a:fld id="{F7021451-1387-4CA6-816F-3879F97B5CBC}" type="slidenum">
+              <a:rPr lang="en-US"/>
+              <a:t>8</a:t>
+            </a:fld>
+            <a:endParaRPr lang="en-US"/>
+          </a:p>
+        </p:txBody>
+      </p:sp>
+    </p:spTree>
+    <p:extLst>
+      <p:ext uri="{BB962C8B-B14F-4D97-AF65-F5344CB8AC3E}">
+        <p14:creationId xmlns:p14="http://schemas.microsoft.com/office/powerpoint/2010/main" val="1024086991"/>
+      </p:ext>
+    </p:extLst>
+  </p:cSld>
+  <p:clrMapOvr>
+    <a:masterClrMapping/>
+  </p:clrMapOvr>
+</p:notes>
+</file>
+
+<file path=ppt/notesSlides/notesSlide9.xml><?xml version="1.0" encoding="utf-8"?>
+<p:notes xmlns:a="http://schemas.openxmlformats.org/drawingml/2006/main" xmlns:r="http://schemas.openxmlformats.org/officeDocument/2006/relationships" xmlns:p="http://schemas.openxmlformats.org/presentationml/2006/main">
+  <p:cSld>
+    <p:spTree>
+      <p:nvGrpSpPr>
+        <p:cNvPr id="1" name=""/>
+        <p:cNvGrpSpPr/>
+        <p:nvPr/>
+      </p:nvGrpSpPr>
+      <p:grpSpPr>
+        <a:xfrm>
+          <a:off x="0" y="0"/>
+          <a:ext cx="0" cy="0"/>
+          <a:chOff x="0" y="0"/>
+          <a:chExt cx="0" cy="0"/>
+        </a:xfrm>
+      </p:grpSpPr>
+      <p:sp>
+        <p:nvSpPr>
+          <p:cNvPr id="2" name="Slide Image Placeholder 1"/>
+          <p:cNvSpPr>
+            <a:spLocks noGrp="1" noRot="1" noChangeAspect="1"/>
+          </p:cNvSpPr>
+          <p:nvPr>
+            <p:ph type="sldImg"/>
+          </p:nvPr>
+        </p:nvSpPr>
+        <p:spPr/>
+      </p:sp>
+      <p:sp>
+        <p:nvSpPr>
+          <p:cNvPr id="3" name="Notes Placeholder 2"/>
+          <p:cNvSpPr>
+            <a:spLocks noGrp="1"/>
+          </p:cNvSpPr>
+          <p:nvPr>
+            <p:ph type="body" idx="1"/>
+          </p:nvPr>
+        </p:nvSpPr>
+        <p:spPr/>
+        <p:txBody>
+          <a:bodyPr/>
+          <a:lstStyle/>
+          <a:p>
+            <a:r>
+              <a:rPr lang="en-US" dirty="0"/>
+              <a:t/>
+            </a:r>
+            <a:endParaRPr lang="en-US" dirty="0"/>
+          </a:p>
+        </p:txBody>
+      </p:sp>
+      <p:sp>
+        <p:nvSpPr>
+          <p:cNvPr id="4" name="Slide Number Placeholder 3"/>
+          <p:cNvSpPr>
+            <a:spLocks noGrp="1"/>
+          </p:cNvSpPr>
+          <p:nvPr>
+            <p:ph type="sldNum" sz="quarter" idx="10"/>
+          </p:nvPr>
+        </p:nvSpPr>
+        <p:spPr/>
+        <p:txBody>
+          <a:bodyPr/>
+          <a:lstStyle/>
+          <a:p>
+            <a:fld id="{F7021451-1387-4CA6-816F-3879F97B5CBC}" type="slidenum">
+              <a:rPr lang="en-US"/>
+              <a:t>9</a:t>
             </a:fld>
             <a:endParaRPr lang="en-US"/>
           </a:p>
@@ -4692,7 +4870,7 @@
         </p:nvSpPr>
         <p:spPr>
           <a:xfrm>
-            <a:off x="457200" y="228600"/>
+            <a:off x="457200" y="182880"/>
             <a:ext cx="8229600" cy="502920"/>
           </a:xfrm>
           <a:prstGeom prst="rect">
@@ -4717,7 +4895,7 @@
                 <a:ea typeface="Arial Black" pitchFamily="34" charset="-122"/>
                 <a:cs typeface="Arial Black" pitchFamily="34" charset="-120"/>
               </a:rPr>
-              <a:t>Input Validation &amp; Error Handling</a:t>
+              <a:t>System Flowchart</a:t>
             </a:r>
             <a:endParaRPr lang="en-US" sz="3000" dirty="0"/>
           </a:p>
@@ -4731,7 +4909,7 @@
         </p:nvSpPr>
         <p:spPr>
           <a:xfrm>
-            <a:off x="457200" y="777240"/>
+            <a:off x="457200" y="713232"/>
             <a:ext cx="8229600" cy="27432"/>
           </a:xfrm>
           <a:prstGeom prst="rect">
@@ -4748,353 +4926,30 @@
           </a:ln>
         </p:spPr>
       </p:sp>
-      <p:sp>
-        <p:nvSpPr>
-          <p:cNvPr id="4" name="Text 2"/>
-          <p:cNvSpPr/>
-          <p:nvPr/>
-        </p:nvSpPr>
-        <p:spPr>
-          <a:xfrm>
-            <a:off x="457200" y="960120"/>
-            <a:ext cx="3931920" cy="320040"/>
-          </a:xfrm>
-          <a:prstGeom prst="rect">
-            <a:avLst/>
-          </a:prstGeom>
-          <a:noFill/>
-          <a:ln/>
-        </p:spPr>
-        <p:txBody>
-          <a:bodyPr wrap="square" lIns="0" tIns="0" rIns="0" bIns="0" rtlCol="0" anchor="ctr"/>
-          <a:lstStyle/>
-          <a:p>
-            <a:pPr algn="l" indent="0" marL="0">
-              <a:buNone/>
-            </a:pPr>
-            <a:r>
-              <a:rPr lang="en-US" sz="1500" b="1" dirty="0">
-                <a:solidFill>
-                  <a:srgbClr val="0369A1"/>
-                </a:solidFill>
-              </a:rPr>
-              <a:t>How It Works</a:t>
-            </a:r>
-            <a:endParaRPr lang="en-US" sz="1500" dirty="0"/>
-          </a:p>
-        </p:txBody>
-      </p:sp>
-      <p:sp>
-        <p:nvSpPr>
-          <p:cNvPr id="5" name="Text 3"/>
-          <p:cNvSpPr/>
-          <p:nvPr/>
-        </p:nvSpPr>
-        <p:spPr>
-          <a:xfrm>
-            <a:off x="457200" y="1371600"/>
-            <a:ext cx="3840480" cy="2286000"/>
-          </a:xfrm>
-          <a:prstGeom prst="rect">
-            <a:avLst/>
-          </a:prstGeom>
-          <a:noFill/>
-          <a:ln/>
-        </p:spPr>
-        <p:txBody>
-          <a:bodyPr wrap="square" lIns="0" tIns="0" rIns="0" bIns="0" rtlCol="0" anchor="ctr"/>
-          <a:lstStyle/>
-          <a:p>
-            <a:pPr algn="l" marL="342900" indent="-342900">
-              <a:buSzPct val="100000"/>
-              <a:buChar char="•"/>
-            </a:pPr>
-            <a:r>
-              <a:rPr lang="en-US" sz="1300" dirty="0">
-                <a:solidFill>
-                  <a:srgbClr val="475569"/>
-                </a:solidFill>
-              </a:rPr>
-              <a:t>Only body temperature is validated (physiological bound).</a:t>
-            </a:r>
-            <a:endParaRPr lang="en-US" sz="1300" dirty="0"/>
-          </a:p>
-          <a:p>
-            <a:pPr algn="l" marL="342900" indent="-342900">
-              <a:buSzPct val="100000"/>
-              <a:buChar char="•"/>
-            </a:pPr>
-            <a:r>
-              <a:rPr lang="en-US" sz="1300" dirty="0">
-                <a:solidFill>
-                  <a:srgbClr val="475569"/>
-                </a:solidFill>
-              </a:rPr>
-              <a:t>Valid range: 0 to 50°C.</a:t>
-            </a:r>
-            <a:endParaRPr lang="en-US" sz="1300" dirty="0"/>
-          </a:p>
-          <a:p>
-            <a:pPr algn="l" marL="342900" indent="-342900">
-              <a:buSzPct val="100000"/>
-              <a:buChar char="•"/>
-            </a:pPr>
-            <a:r>
-              <a:rPr lang="en-US" sz="1300" dirty="0">
-                <a:solidFill>
-                  <a:srgbClr val="475569"/>
-                </a:solidFill>
-              </a:rPr>
-              <a:t>Any value outside this range triggers an error message and re-prompts the user.</a:t>
-            </a:r>
-            <a:endParaRPr lang="en-US" sz="1300" dirty="0"/>
-          </a:p>
-          <a:p>
-            <a:pPr algn="l" marL="342900" indent="-342900">
-              <a:buSzPct val="100000"/>
-              <a:buChar char="•"/>
-            </a:pPr>
-            <a:r>
-              <a:rPr lang="en-US" sz="1300" dirty="0">
-                <a:solidFill>
-                  <a:srgbClr val="475569"/>
-                </a:solidFill>
-              </a:rPr>
-              <a:t>The program loops internally until a valid value is entered — it never crashes or skips.</a:t>
-            </a:r>
-            <a:endParaRPr lang="en-US" sz="1300" dirty="0"/>
-          </a:p>
-        </p:txBody>
-      </p:sp>
-      <p:sp>
-        <p:nvSpPr>
-          <p:cNvPr id="6" name="Text 4"/>
-          <p:cNvSpPr/>
-          <p:nvPr/>
-        </p:nvSpPr>
-        <p:spPr>
-          <a:xfrm>
-            <a:off x="4663440" y="960120"/>
-            <a:ext cx="4023360" cy="320040"/>
-          </a:xfrm>
-          <a:prstGeom prst="rect">
-            <a:avLst/>
-          </a:prstGeom>
-          <a:noFill/>
-          <a:ln/>
-        </p:spPr>
-        <p:txBody>
-          <a:bodyPr wrap="square" lIns="0" tIns="0" rIns="0" bIns="0" rtlCol="0" anchor="ctr"/>
-          <a:lstStyle/>
-          <a:p>
-            <a:pPr algn="l" indent="0" marL="0">
-              <a:buNone/>
-            </a:pPr>
-            <a:r>
-              <a:rPr lang="en-US" sz="1500" b="1" dirty="0">
-                <a:solidFill>
-                  <a:srgbClr val="0369A1"/>
-                </a:solidFill>
-              </a:rPr>
-              <a:t>Console Output  (TC-05)</a:t>
-            </a:r>
-            <a:endParaRPr lang="en-US" sz="1500" dirty="0"/>
-          </a:p>
-        </p:txBody>
-      </p:sp>
-      <p:sp>
-        <p:nvSpPr>
-          <p:cNvPr id="7" name="Shape 5"/>
-          <p:cNvSpPr/>
-          <p:nvPr/>
-        </p:nvSpPr>
-        <p:spPr>
-          <a:xfrm>
-            <a:off x="4663440" y="1371600"/>
-            <a:ext cx="4023360" cy="2560320"/>
-          </a:xfrm>
-          <a:prstGeom prst="rect">
-            <a:avLst/>
-          </a:prstGeom>
-          <a:solidFill>
-            <a:srgbClr val="1E1E2E"/>
-          </a:solidFill>
-          <a:ln w="12700">
-            <a:solidFill>
-              <a:srgbClr val="374151"/>
-            </a:solidFill>
-            <a:prstDash val="solid"/>
-          </a:ln>
-        </p:spPr>
-      </p:sp>
-      <p:sp>
-        <p:nvSpPr>
-          <p:cNvPr id="8" name="Text 6"/>
-          <p:cNvSpPr/>
-          <p:nvPr/>
-        </p:nvSpPr>
-        <p:spPr>
-          <a:xfrm>
-            <a:off x="4800600" y="1508760"/>
-            <a:ext cx="3749040" cy="2286000"/>
-          </a:xfrm>
-          <a:prstGeom prst="rect">
-            <a:avLst/>
-          </a:prstGeom>
-          <a:noFill/>
-          <a:ln/>
-        </p:spPr>
-        <p:txBody>
-          <a:bodyPr wrap="square" lIns="0" tIns="0" rIns="0" bIns="0" rtlCol="0" anchor="ctr"/>
-          <a:lstStyle/>
-          <a:p>
-            <a:pPr algn="l" indent="0" marL="0">
-              <a:buNone/>
-            </a:pPr>
-            <a:r>
-              <a:rPr lang="en-US" sz="1100" dirty="0">
-                <a:solidFill>
-                  <a:srgbClr val="94A3B8"/>
-                </a:solidFill>
-                <a:latin typeface="Consolas" pitchFamily="34" charset="0"/>
-                <a:ea typeface="Consolas" pitchFamily="34" charset="-122"/>
-                <a:cs typeface="Consolas" pitchFamily="34" charset="-120"/>
-              </a:rPr>
-              <a:t>[SENSOR S1] Enter Body Temperature (0-50 C): </a:t>
-            </a:r>
-            <a:pPr algn="l" indent="0" marL="0">
-              <a:buNone/>
-            </a:pPr>
-            <a:r>
-              <a:rPr lang="en-US" sz="1100" b="1" dirty="0">
-                <a:solidFill>
-                  <a:srgbClr val="F87171"/>
-                </a:solidFill>
-                <a:latin typeface="Consolas" pitchFamily="34" charset="0"/>
-                <a:ea typeface="Consolas" pitchFamily="34" charset="-122"/>
-                <a:cs typeface="Consolas" pitchFamily="34" charset="-120"/>
-              </a:rPr>
-              <a:t>120</a:t>
-            </a:r>
-            <a:pPr algn="l" indent="0" marL="0">
-              <a:buNone/>
-            </a:pPr>
-            <a:r>
-              <a:rPr lang="en-US" sz="1100" dirty="0">
-                <a:solidFill>
-                  <a:srgbClr val="000000"/>
-                </a:solidFill>
-                <a:latin typeface="Consolas" pitchFamily="34" charset="0"/>
-                <a:ea typeface="Consolas" pitchFamily="34" charset="-122"/>
-                <a:cs typeface="Consolas" pitchFamily="34" charset="-120"/>
-              </a:rPr>
-              <a:t>
-</a:t>
-            </a:r>
-            <a:pPr algn="l" indent="0" marL="0">
-              <a:buNone/>
-            </a:pPr>
-            <a:r>
-              <a:rPr lang="en-US" sz="1100" b="1" dirty="0">
-                <a:solidFill>
-                  <a:srgbClr val="FCA5A5"/>
-                </a:solidFill>
-                <a:latin typeface="Consolas" pitchFamily="34" charset="0"/>
-                <a:ea typeface="Consolas" pitchFamily="34" charset="-122"/>
-                <a:cs typeface="Consolas" pitchFamily="34" charset="-120"/>
-              </a:rPr>
-              <a:t>[ERROR]: Out of human physiological bounds! Enter 0 to 50.</a:t>
-            </a:r>
-            <a:pPr algn="l" indent="0" marL="0">
-              <a:buNone/>
-            </a:pPr>
-            <a:r>
-              <a:rPr lang="en-US" sz="1100" dirty="0">
-                <a:solidFill>
-                  <a:srgbClr val="000000"/>
-                </a:solidFill>
-                <a:latin typeface="Consolas" pitchFamily="34" charset="0"/>
-                <a:ea typeface="Consolas" pitchFamily="34" charset="-122"/>
-                <a:cs typeface="Consolas" pitchFamily="34" charset="-120"/>
-              </a:rPr>
-              <a:t>
-</a:t>
-            </a:r>
-            <a:pPr algn="l" indent="0" marL="0">
-              <a:buNone/>
-            </a:pPr>
-            <a:r>
-              <a:rPr lang="en-US" sz="1100" dirty="0">
-                <a:solidFill>
-                  <a:srgbClr val="94A3B8"/>
-                </a:solidFill>
-                <a:latin typeface="Consolas" pitchFamily="34" charset="0"/>
-                <a:ea typeface="Consolas" pitchFamily="34" charset="-122"/>
-                <a:cs typeface="Consolas" pitchFamily="34" charset="-120"/>
-              </a:rPr>
-              <a:t>[SENSOR S1] Enter Body Temperature (0-50 C): </a:t>
-            </a:r>
-            <a:pPr algn="l" indent="0" marL="0">
-              <a:buNone/>
-            </a:pPr>
-            <a:r>
-              <a:rPr lang="en-US" sz="1100" b="1" dirty="0">
-                <a:solidFill>
-                  <a:srgbClr val="86EFAC"/>
-                </a:solidFill>
-                <a:latin typeface="Consolas" pitchFamily="34" charset="0"/>
-                <a:ea typeface="Consolas" pitchFamily="34" charset="-122"/>
-                <a:cs typeface="Consolas" pitchFamily="34" charset="-120"/>
-              </a:rPr>
-              <a:t>37</a:t>
-            </a:r>
-            <a:pPr algn="l" indent="0" marL="0">
-              <a:buNone/>
-            </a:pPr>
-            <a:r>
-              <a:rPr lang="en-US" sz="1100" dirty="0">
-                <a:solidFill>
-                  <a:srgbClr val="000000"/>
-                </a:solidFill>
-                <a:latin typeface="Consolas" pitchFamily="34" charset="0"/>
-                <a:ea typeface="Consolas" pitchFamily="34" charset="-122"/>
-                <a:cs typeface="Consolas" pitchFamily="34" charset="-120"/>
-              </a:rPr>
-              <a:t>
-</a:t>
-            </a:r>
-            <a:pPr algn="l" indent="0" marL="0">
-              <a:buNone/>
-            </a:pPr>
-            <a:r>
-              <a:rPr lang="en-US" sz="1100" dirty="0">
-                <a:solidFill>
-                  <a:srgbClr val="94A3B8"/>
-                </a:solidFill>
-                <a:latin typeface="Consolas" pitchFamily="34" charset="0"/>
-                <a:ea typeface="Consolas" pitchFamily="34" charset="-122"/>
-                <a:cs typeface="Consolas" pitchFamily="34" charset="-120"/>
-              </a:rPr>
-              <a:t>[SENSOR S2] Enter Heart Rate (BPM): </a:t>
-            </a:r>
-            <a:pPr algn="l" indent="0" marL="0">
-              <a:buNone/>
-            </a:pPr>
-            <a:r>
-              <a:rPr lang="en-US" sz="1100" dirty="0">
-                <a:solidFill>
-                  <a:srgbClr val="94A3B8"/>
-                </a:solidFill>
-                <a:latin typeface="Consolas" pitchFamily="34" charset="0"/>
-                <a:ea typeface="Consolas" pitchFamily="34" charset="-122"/>
-                <a:cs typeface="Consolas" pitchFamily="34" charset="-120"/>
-              </a:rPr>
-              <a:t>...</a:t>
-            </a:r>
-            <a:endParaRPr lang="en-US" sz="1100" dirty="0"/>
-          </a:p>
-        </p:txBody>
-      </p:sp>
+      <p:pic>
+        <p:nvPicPr>
+          <p:cNvPr id="4" name="Image 0" descr="/sessions/blissful-modest-fermat/mnt/caal-gpro/submission4/flowchart_cropped.jpg">    </p:cNvPr>
+          <p:cNvPicPr>
+            <a:picLocks noChangeAspect="1"/>
+          </p:cNvPicPr>
+          <p:nvPr/>
+        </p:nvPicPr>
+        <p:blipFill>
+          <a:blip r:embed="rId1"/>
+          <a:stretch>
+            <a:fillRect/>
+          </a:stretch>
+        </p:blipFill>
+        <p:spPr>
+          <a:xfrm>
+            <a:off x="1371600" y="822960"/>
+            <a:ext cx="6400800" cy="4160520"/>
+          </a:xfrm>
+          <a:prstGeom prst="rect">
+            <a:avLst/>
+          </a:prstGeom>
+        </p:spPr>
+      </p:pic>
     </p:spTree>
   </p:cSld>
   <p:clrMapOvr>
@@ -5160,7 +5015,7 @@
                 <a:ea typeface="Arial Black" pitchFamily="34" charset="-122"/>
                 <a:cs typeface="Arial Black" pitchFamily="34" charset="-120"/>
               </a:rPr>
-              <a:t>Test Case Results</a:t>
+              <a:t>Input Validation &amp; Error Handling</a:t>
             </a:r>
             <a:endParaRPr lang="en-US" sz="3000" dirty="0"/>
           </a:p>
@@ -5193,24 +5048,178 @@
       </p:sp>
       <p:sp>
         <p:nvSpPr>
-          <p:cNvPr id="4" name="Shape 2"/>
-          <p:cNvSpPr/>
-          <p:nvPr/>
-        </p:nvSpPr>
-        <p:spPr>
-          <a:xfrm>
-            <a:off x="457200" y="914400"/>
-            <a:ext cx="8229600" cy="347472"/>
+          <p:cNvPr id="4" name="Text 2"/>
+          <p:cNvSpPr/>
+          <p:nvPr/>
+        </p:nvSpPr>
+        <p:spPr>
+          <a:xfrm>
+            <a:off x="457200" y="960120"/>
+            <a:ext cx="3931920" cy="320040"/>
+          </a:xfrm>
+          <a:prstGeom prst="rect">
+            <a:avLst/>
+          </a:prstGeom>
+          <a:noFill/>
+          <a:ln/>
+        </p:spPr>
+        <p:txBody>
+          <a:bodyPr wrap="square" lIns="0" tIns="0" rIns="0" bIns="0" rtlCol="0" anchor="ctr"/>
+          <a:lstStyle/>
+          <a:p>
+            <a:pPr algn="l" indent="0" marL="0">
+              <a:buNone/>
+            </a:pPr>
+            <a:r>
+              <a:rPr lang="en-US" sz="1500" b="1" dirty="0">
+                <a:solidFill>
+                  <a:srgbClr val="0369A1"/>
+                </a:solidFill>
+              </a:rPr>
+              <a:t>How It Works</a:t>
+            </a:r>
+            <a:endParaRPr lang="en-US" sz="1500" dirty="0"/>
+          </a:p>
+        </p:txBody>
+      </p:sp>
+      <p:sp>
+        <p:nvSpPr>
+          <p:cNvPr id="5" name="Text 3"/>
+          <p:cNvSpPr/>
+          <p:nvPr/>
+        </p:nvSpPr>
+        <p:spPr>
+          <a:xfrm>
+            <a:off x="457200" y="1371600"/>
+            <a:ext cx="3840480" cy="2286000"/>
+          </a:xfrm>
+          <a:prstGeom prst="rect">
+            <a:avLst/>
+          </a:prstGeom>
+          <a:noFill/>
+          <a:ln/>
+        </p:spPr>
+        <p:txBody>
+          <a:bodyPr wrap="square" lIns="0" tIns="0" rIns="0" bIns="0" rtlCol="0" anchor="ctr"/>
+          <a:lstStyle/>
+          <a:p>
+            <a:pPr algn="l" marL="342900" indent="-342900">
+              <a:buSzPct val="100000"/>
+              <a:buChar char="•"/>
+            </a:pPr>
+            <a:r>
+              <a:rPr lang="en-US" sz="1300" dirty="0">
+                <a:solidFill>
+                  <a:srgbClr val="475569"/>
+                </a:solidFill>
+              </a:rPr>
+              <a:t>Only body temperature is validated (physiological bound).</a:t>
+            </a:r>
+            <a:endParaRPr lang="en-US" sz="1300" dirty="0"/>
+          </a:p>
+          <a:p>
+            <a:pPr algn="l" marL="342900" indent="-342900">
+              <a:buSzPct val="100000"/>
+              <a:buChar char="•"/>
+            </a:pPr>
+            <a:r>
+              <a:rPr lang="en-US" sz="1300" dirty="0">
+                <a:solidFill>
+                  <a:srgbClr val="475569"/>
+                </a:solidFill>
+              </a:rPr>
+              <a:t>Valid range: 0 to 50°C.</a:t>
+            </a:r>
+            <a:endParaRPr lang="en-US" sz="1300" dirty="0"/>
+          </a:p>
+          <a:p>
+            <a:pPr algn="l" marL="342900" indent="-342900">
+              <a:buSzPct val="100000"/>
+              <a:buChar char="•"/>
+            </a:pPr>
+            <a:r>
+              <a:rPr lang="en-US" sz="1300" dirty="0">
+                <a:solidFill>
+                  <a:srgbClr val="475569"/>
+                </a:solidFill>
+              </a:rPr>
+              <a:t>Any value outside this range triggers an error message and re-prompts the user.</a:t>
+            </a:r>
+            <a:endParaRPr lang="en-US" sz="1300" dirty="0"/>
+          </a:p>
+          <a:p>
+            <a:pPr algn="l" marL="342900" indent="-342900">
+              <a:buSzPct val="100000"/>
+              <a:buChar char="•"/>
+            </a:pPr>
+            <a:r>
+              <a:rPr lang="en-US" sz="1300" dirty="0">
+                <a:solidFill>
+                  <a:srgbClr val="475569"/>
+                </a:solidFill>
+              </a:rPr>
+              <a:t>The program loops internally until a valid value is entered — it never crashes or skips.</a:t>
+            </a:r>
+            <a:endParaRPr lang="en-US" sz="1300" dirty="0"/>
+          </a:p>
+        </p:txBody>
+      </p:sp>
+      <p:sp>
+        <p:nvSpPr>
+          <p:cNvPr id="6" name="Text 4"/>
+          <p:cNvSpPr/>
+          <p:nvPr/>
+        </p:nvSpPr>
+        <p:spPr>
+          <a:xfrm>
+            <a:off x="4663440" y="960120"/>
+            <a:ext cx="4023360" cy="320040"/>
+          </a:xfrm>
+          <a:prstGeom prst="rect">
+            <a:avLst/>
+          </a:prstGeom>
+          <a:noFill/>
+          <a:ln/>
+        </p:spPr>
+        <p:txBody>
+          <a:bodyPr wrap="square" lIns="0" tIns="0" rIns="0" bIns="0" rtlCol="0" anchor="ctr"/>
+          <a:lstStyle/>
+          <a:p>
+            <a:pPr algn="l" indent="0" marL="0">
+              <a:buNone/>
+            </a:pPr>
+            <a:r>
+              <a:rPr lang="en-US" sz="1500" b="1" dirty="0">
+                <a:solidFill>
+                  <a:srgbClr val="0369A1"/>
+                </a:solidFill>
+              </a:rPr>
+              <a:t>Console Output  (TC-05)</a:t>
+            </a:r>
+            <a:endParaRPr lang="en-US" sz="1500" dirty="0"/>
+          </a:p>
+        </p:txBody>
+      </p:sp>
+      <p:sp>
+        <p:nvSpPr>
+          <p:cNvPr id="7" name="Shape 5"/>
+          <p:cNvSpPr/>
+          <p:nvPr/>
+        </p:nvSpPr>
+        <p:spPr>
+          <a:xfrm>
+            <a:off x="4663440" y="1371600"/>
+            <a:ext cx="4023360" cy="2560320"/>
           </a:xfrm>
           <a:prstGeom prst="rect">
             <a:avLst/>
           </a:prstGeom>
           <a:solidFill>
-            <a:srgbClr val="111827"/>
+            <a:srgbClr val="1E1E2E"/>
           </a:solidFill>
           <a:ln w="12700">
             <a:solidFill>
-              <a:srgbClr val="111827"/>
+              <a:srgbClr val="374151"/>
             </a:solidFill>
             <a:prstDash val="solid"/>
           </a:ln>
@@ -5218,1295 +5227,169 @@
       </p:sp>
       <p:sp>
         <p:nvSpPr>
-          <p:cNvPr id="5" name="Text 3"/>
-          <p:cNvSpPr/>
-          <p:nvPr/>
-        </p:nvSpPr>
-        <p:spPr>
-          <a:xfrm>
-            <a:off x="548640" y="960120"/>
-            <a:ext cx="1097280" cy="256032"/>
-          </a:xfrm>
-          <a:prstGeom prst="rect">
-            <a:avLst/>
-          </a:prstGeom>
-          <a:noFill/>
-          <a:ln/>
-        </p:spPr>
-        <p:txBody>
-          <a:bodyPr wrap="square" lIns="0" tIns="0" rIns="0" bIns="0" rtlCol="0" anchor="ctr"/>
-          <a:lstStyle/>
-          <a:p>
+          <p:cNvPr id="8" name="Text 6"/>
+          <p:cNvSpPr/>
+          <p:nvPr/>
+        </p:nvSpPr>
+        <p:spPr>
+          <a:xfrm>
+            <a:off x="4800600" y="1508760"/>
+            <a:ext cx="3749040" cy="2286000"/>
+          </a:xfrm>
+          <a:prstGeom prst="rect">
+            <a:avLst/>
+          </a:prstGeom>
+          <a:noFill/>
+          <a:ln/>
+        </p:spPr>
+        <p:txBody>
+          <a:bodyPr wrap="square" lIns="0" tIns="0" rIns="0" bIns="0" rtlCol="0" anchor="ctr"/>
+          <a:lstStyle/>
+          <a:p>
+            <a:pPr algn="l" indent="0" marL="0">
+              <a:buNone/>
+            </a:pPr>
+            <a:r>
+              <a:rPr lang="en-US" sz="1100" dirty="0">
+                <a:solidFill>
+                  <a:srgbClr val="94A3B8"/>
+                </a:solidFill>
+                <a:latin typeface="Consolas" pitchFamily="34" charset="0"/>
+                <a:ea typeface="Consolas" pitchFamily="34" charset="-122"/>
+                <a:cs typeface="Consolas" pitchFamily="34" charset="-120"/>
+              </a:rPr>
+              <a:t>[SENSOR S1] Enter Body Temperature (0-50 C): </a:t>
+            </a:r>
             <a:pPr algn="l" indent="0" marL="0">
               <a:buNone/>
             </a:pPr>
             <a:r>
               <a:rPr lang="en-US" sz="1100" b="1" dirty="0">
                 <a:solidFill>
-                  <a:srgbClr val="FFFFFF"/>
-                </a:solidFill>
-              </a:rPr>
-              <a:t>Test Case</a:t>
+                  <a:srgbClr val="F87171"/>
+                </a:solidFill>
+                <a:latin typeface="Consolas" pitchFamily="34" charset="0"/>
+                <a:ea typeface="Consolas" pitchFamily="34" charset="-122"/>
+                <a:cs typeface="Consolas" pitchFamily="34" charset="-120"/>
+              </a:rPr>
+              <a:t>120</a:t>
+            </a:r>
+            <a:pPr algn="l" indent="0" marL="0">
+              <a:buNone/>
+            </a:pPr>
+            <a:r>
+              <a:rPr lang="en-US" sz="1100" dirty="0">
+                <a:solidFill>
+                  <a:srgbClr val="000000"/>
+                </a:solidFill>
+                <a:latin typeface="Consolas" pitchFamily="34" charset="0"/>
+                <a:ea typeface="Consolas" pitchFamily="34" charset="-122"/>
+                <a:cs typeface="Consolas" pitchFamily="34" charset="-120"/>
+              </a:rPr>
+              <a:t>
+</a:t>
+            </a:r>
+            <a:pPr algn="l" indent="0" marL="0">
+              <a:buNone/>
+            </a:pPr>
+            <a:r>
+              <a:rPr lang="en-US" sz="1100" b="1" dirty="0">
+                <a:solidFill>
+                  <a:srgbClr val="FCA5A5"/>
+                </a:solidFill>
+                <a:latin typeface="Consolas" pitchFamily="34" charset="0"/>
+                <a:ea typeface="Consolas" pitchFamily="34" charset="-122"/>
+                <a:cs typeface="Consolas" pitchFamily="34" charset="-120"/>
+              </a:rPr>
+              <a:t>[ERROR]: Out of human physiological bounds! Enter 0 to 50.</a:t>
+            </a:r>
+            <a:pPr algn="l" indent="0" marL="0">
+              <a:buNone/>
+            </a:pPr>
+            <a:r>
+              <a:rPr lang="en-US" sz="1100" dirty="0">
+                <a:solidFill>
+                  <a:srgbClr val="000000"/>
+                </a:solidFill>
+                <a:latin typeface="Consolas" pitchFamily="34" charset="0"/>
+                <a:ea typeface="Consolas" pitchFamily="34" charset="-122"/>
+                <a:cs typeface="Consolas" pitchFamily="34" charset="-120"/>
+              </a:rPr>
+              <a:t>
+</a:t>
+            </a:r>
+            <a:pPr algn="l" indent="0" marL="0">
+              <a:buNone/>
+            </a:pPr>
+            <a:r>
+              <a:rPr lang="en-US" sz="1100" dirty="0">
+                <a:solidFill>
+                  <a:srgbClr val="94A3B8"/>
+                </a:solidFill>
+                <a:latin typeface="Consolas" pitchFamily="34" charset="0"/>
+                <a:ea typeface="Consolas" pitchFamily="34" charset="-122"/>
+                <a:cs typeface="Consolas" pitchFamily="34" charset="-120"/>
+              </a:rPr>
+              <a:t>[SENSOR S1] Enter Body Temperature (0-50 C): </a:t>
+            </a:r>
+            <a:pPr algn="l" indent="0" marL="0">
+              <a:buNone/>
+            </a:pPr>
+            <a:r>
+              <a:rPr lang="en-US" sz="1100" b="1" dirty="0">
+                <a:solidFill>
+                  <a:srgbClr val="86EFAC"/>
+                </a:solidFill>
+                <a:latin typeface="Consolas" pitchFamily="34" charset="0"/>
+                <a:ea typeface="Consolas" pitchFamily="34" charset="-122"/>
+                <a:cs typeface="Consolas" pitchFamily="34" charset="-120"/>
+              </a:rPr>
+              <a:t>37</a:t>
+            </a:r>
+            <a:pPr algn="l" indent="0" marL="0">
+              <a:buNone/>
+            </a:pPr>
+            <a:r>
+              <a:rPr lang="en-US" sz="1100" dirty="0">
+                <a:solidFill>
+                  <a:srgbClr val="000000"/>
+                </a:solidFill>
+                <a:latin typeface="Consolas" pitchFamily="34" charset="0"/>
+                <a:ea typeface="Consolas" pitchFamily="34" charset="-122"/>
+                <a:cs typeface="Consolas" pitchFamily="34" charset="-120"/>
+              </a:rPr>
+              <a:t>
+</a:t>
+            </a:r>
+            <a:pPr algn="l" indent="0" marL="0">
+              <a:buNone/>
+            </a:pPr>
+            <a:r>
+              <a:rPr lang="en-US" sz="1100" dirty="0">
+                <a:solidFill>
+                  <a:srgbClr val="94A3B8"/>
+                </a:solidFill>
+                <a:latin typeface="Consolas" pitchFamily="34" charset="0"/>
+                <a:ea typeface="Consolas" pitchFamily="34" charset="-122"/>
+                <a:cs typeface="Consolas" pitchFamily="34" charset="-120"/>
+              </a:rPr>
+              <a:t>[SENSOR S2] Enter Heart Rate (BPM): </a:t>
+            </a:r>
+            <a:pPr algn="l" indent="0" marL="0">
+              <a:buNone/>
+            </a:pPr>
+            <a:r>
+              <a:rPr lang="en-US" sz="1100" dirty="0">
+                <a:solidFill>
+                  <a:srgbClr val="94A3B8"/>
+                </a:solidFill>
+                <a:latin typeface="Consolas" pitchFamily="34" charset="0"/>
+                <a:ea typeface="Consolas" pitchFamily="34" charset="-122"/>
+                <a:cs typeface="Consolas" pitchFamily="34" charset="-120"/>
+              </a:rPr>
+              <a:t>...</a:t>
             </a:r>
             <a:endParaRPr lang="en-US" sz="1100" dirty="0"/>
-          </a:p>
-        </p:txBody>
-      </p:sp>
-      <p:sp>
-        <p:nvSpPr>
-          <p:cNvPr id="6" name="Text 4"/>
-          <p:cNvSpPr/>
-          <p:nvPr/>
-        </p:nvSpPr>
-        <p:spPr>
-          <a:xfrm>
-            <a:off x="1737360" y="960120"/>
-            <a:ext cx="2834640" cy="256032"/>
-          </a:xfrm>
-          <a:prstGeom prst="rect">
-            <a:avLst/>
-          </a:prstGeom>
-          <a:noFill/>
-          <a:ln/>
-        </p:spPr>
-        <p:txBody>
-          <a:bodyPr wrap="square" lIns="0" tIns="0" rIns="0" bIns="0" rtlCol="0" anchor="ctr"/>
-          <a:lstStyle/>
-          <a:p>
-            <a:pPr algn="l" indent="0" marL="0">
-              <a:buNone/>
-            </a:pPr>
-            <a:r>
-              <a:rPr lang="en-US" sz="1100" b="1" dirty="0">
-                <a:solidFill>
-                  <a:srgbClr val="FFFFFF"/>
-                </a:solidFill>
-              </a:rPr>
-              <a:t>Inputs</a:t>
-            </a:r>
-            <a:endParaRPr lang="en-US" sz="1100" dirty="0"/>
-          </a:p>
-        </p:txBody>
-      </p:sp>
-      <p:sp>
-        <p:nvSpPr>
-          <p:cNvPr id="7" name="Text 5"/>
-          <p:cNvSpPr/>
-          <p:nvPr/>
-        </p:nvSpPr>
-        <p:spPr>
-          <a:xfrm>
-            <a:off x="4663440" y="960120"/>
-            <a:ext cx="3291840" cy="256032"/>
-          </a:xfrm>
-          <a:prstGeom prst="rect">
-            <a:avLst/>
-          </a:prstGeom>
-          <a:noFill/>
-          <a:ln/>
-        </p:spPr>
-        <p:txBody>
-          <a:bodyPr wrap="square" lIns="0" tIns="0" rIns="0" bIns="0" rtlCol="0" anchor="ctr"/>
-          <a:lstStyle/>
-          <a:p>
-            <a:pPr algn="l" indent="0" marL="0">
-              <a:buNone/>
-            </a:pPr>
-            <a:r>
-              <a:rPr lang="en-US" sz="1100" b="1" dirty="0">
-                <a:solidFill>
-                  <a:srgbClr val="FFFFFF"/>
-                </a:solidFill>
-              </a:rPr>
-              <a:t>Expected Output</a:t>
-            </a:r>
-            <a:endParaRPr lang="en-US" sz="1100" dirty="0"/>
-          </a:p>
-        </p:txBody>
-      </p:sp>
-      <p:sp>
-        <p:nvSpPr>
-          <p:cNvPr id="8" name="Text 6"/>
-          <p:cNvSpPr/>
-          <p:nvPr/>
-        </p:nvSpPr>
-        <p:spPr>
-          <a:xfrm>
-            <a:off x="8229600" y="960120"/>
-            <a:ext cx="457200" cy="256032"/>
-          </a:xfrm>
-          <a:prstGeom prst="rect">
-            <a:avLst/>
-          </a:prstGeom>
-          <a:noFill/>
-          <a:ln/>
-        </p:spPr>
-        <p:txBody>
-          <a:bodyPr wrap="square" lIns="0" tIns="0" rIns="0" bIns="0" rtlCol="0" anchor="ctr"/>
-          <a:lstStyle/>
-          <a:p>
-            <a:pPr algn="ctr" indent="0" marL="0">
-              <a:buNone/>
-            </a:pPr>
-            <a:r>
-              <a:rPr lang="en-US" sz="1100" b="1" dirty="0">
-                <a:solidFill>
-                  <a:srgbClr val="FFFFFF"/>
-                </a:solidFill>
-              </a:rPr>
-              <a:t>✓</a:t>
-            </a:r>
-            <a:endParaRPr lang="en-US" sz="1100" dirty="0"/>
-          </a:p>
-        </p:txBody>
-      </p:sp>
-      <p:sp>
-        <p:nvSpPr>
-          <p:cNvPr id="9" name="Shape 7"/>
-          <p:cNvSpPr/>
-          <p:nvPr/>
-        </p:nvSpPr>
-        <p:spPr>
-          <a:xfrm>
-            <a:off x="457200" y="1280160"/>
-            <a:ext cx="8229600" cy="685800"/>
-          </a:xfrm>
-          <a:prstGeom prst="rect">
-            <a:avLst/>
-          </a:prstGeom>
-          <a:solidFill>
-            <a:srgbClr val="FFFFFF"/>
-          </a:solidFill>
-          <a:ln w="12700">
-            <a:solidFill>
-              <a:srgbClr val="E2E8F0"/>
-            </a:solidFill>
-            <a:prstDash val="solid"/>
-          </a:ln>
-        </p:spPr>
-      </p:sp>
-      <p:sp>
-        <p:nvSpPr>
-          <p:cNvPr id="10" name="Shape 8"/>
-          <p:cNvSpPr/>
-          <p:nvPr/>
-        </p:nvSpPr>
-        <p:spPr>
-          <a:xfrm>
-            <a:off x="457200" y="1280160"/>
-            <a:ext cx="54864" cy="685800"/>
-          </a:xfrm>
-          <a:prstGeom prst="rect">
-            <a:avLst/>
-          </a:prstGeom>
-          <a:solidFill>
-            <a:srgbClr val="16A34A"/>
-          </a:solidFill>
-          <a:ln w="12700">
-            <a:solidFill>
-              <a:srgbClr val="16A34A"/>
-            </a:solidFill>
-            <a:prstDash val="solid"/>
-          </a:ln>
-        </p:spPr>
-      </p:sp>
-      <p:sp>
-        <p:nvSpPr>
-          <p:cNvPr id="11" name="Text 9"/>
-          <p:cNvSpPr/>
-          <p:nvPr/>
-        </p:nvSpPr>
-        <p:spPr>
-          <a:xfrm>
-            <a:off x="566928" y="1325880"/>
-            <a:ext cx="1051560" cy="256032"/>
-          </a:xfrm>
-          <a:prstGeom prst="rect">
-            <a:avLst/>
-          </a:prstGeom>
-          <a:noFill/>
-          <a:ln/>
-        </p:spPr>
-        <p:txBody>
-          <a:bodyPr wrap="square" lIns="0" tIns="0" rIns="0" bIns="0" rtlCol="0" anchor="ctr"/>
-          <a:lstStyle/>
-          <a:p>
-            <a:pPr algn="l" indent="0" marL="0">
-              <a:buNone/>
-            </a:pPr>
-            <a:r>
-              <a:rPr lang="en-US" sz="1100" b="1" dirty="0">
-                <a:solidFill>
-                  <a:srgbClr val="16A34A"/>
-                </a:solidFill>
-              </a:rPr>
-              <a:t>TC-01</a:t>
-            </a:r>
-            <a:endParaRPr lang="en-US" sz="1100" dirty="0"/>
-          </a:p>
-        </p:txBody>
-      </p:sp>
-      <p:sp>
-        <p:nvSpPr>
-          <p:cNvPr id="12" name="Text 10"/>
-          <p:cNvSpPr/>
-          <p:nvPr/>
-        </p:nvSpPr>
-        <p:spPr>
-          <a:xfrm>
-            <a:off x="566928" y="1627632"/>
-            <a:ext cx="1051560" cy="228600"/>
-          </a:xfrm>
-          <a:prstGeom prst="rect">
-            <a:avLst/>
-          </a:prstGeom>
-          <a:noFill/>
-          <a:ln/>
-        </p:spPr>
-        <p:txBody>
-          <a:bodyPr wrap="square" lIns="0" tIns="0" rIns="0" bIns="0" rtlCol="0" anchor="ctr"/>
-          <a:lstStyle/>
-          <a:p>
-            <a:pPr algn="l" indent="0" marL="0">
-              <a:buNone/>
-            </a:pPr>
-            <a:r>
-              <a:rPr lang="en-US" sz="900" dirty="0">
-                <a:solidFill>
-                  <a:srgbClr val="475569"/>
-                </a:solidFill>
-              </a:rPr>
-              <a:t>Normal Safe</a:t>
-            </a:r>
-            <a:endParaRPr lang="en-US" sz="900" dirty="0"/>
-          </a:p>
-        </p:txBody>
-      </p:sp>
-      <p:sp>
-        <p:nvSpPr>
-          <p:cNvPr id="13" name="Text 11"/>
-          <p:cNvSpPr/>
-          <p:nvPr/>
-        </p:nvSpPr>
-        <p:spPr>
-          <a:xfrm>
-            <a:off x="1737360" y="1371600"/>
-            <a:ext cx="2834640" cy="548640"/>
-          </a:xfrm>
-          <a:prstGeom prst="rect">
-            <a:avLst/>
-          </a:prstGeom>
-          <a:noFill/>
-          <a:ln/>
-        </p:spPr>
-        <p:txBody>
-          <a:bodyPr wrap="square" lIns="0" tIns="0" rIns="0" bIns="0" rtlCol="0" anchor="ctr"/>
-          <a:lstStyle/>
-          <a:p>
-            <a:pPr algn="l" indent="0" marL="0">
-              <a:buNone/>
-            </a:pPr>
-            <a:r>
-              <a:rPr lang="en-US" sz="1000" dirty="0">
-                <a:solidFill>
-                  <a:srgbClr val="0F172A"/>
-                </a:solidFill>
-              </a:rPr>
-              <a:t>Temp=36, HR=80, Accel=15, Timer=2</a:t>
-            </a:r>
-            <a:endParaRPr lang="en-US" sz="1000" dirty="0"/>
-          </a:p>
-        </p:txBody>
-      </p:sp>
-      <p:sp>
-        <p:nvSpPr>
-          <p:cNvPr id="14" name="Text 12"/>
-          <p:cNvSpPr/>
-          <p:nvPr/>
-        </p:nvSpPr>
-        <p:spPr>
-          <a:xfrm>
-            <a:off x="4663440" y="1371600"/>
-            <a:ext cx="3291840" cy="548640"/>
-          </a:xfrm>
-          <a:prstGeom prst="rect">
-            <a:avLst/>
-          </a:prstGeom>
-          <a:noFill/>
-          <a:ln/>
-        </p:spPr>
-        <p:txBody>
-          <a:bodyPr wrap="square" lIns="0" tIns="0" rIns="0" bIns="0" rtlCol="0" anchor="ctr"/>
-          <a:lstStyle/>
-          <a:p>
-            <a:pPr algn="l" indent="0" marL="0">
-              <a:buNone/>
-            </a:pPr>
-            <a:r>
-              <a:rPr lang="en-US" sz="1000" dirty="0">
-                <a:solidFill>
-                  <a:srgbClr val="475569"/>
-                </a:solidFill>
-              </a:rPr>
-              <a:t>[Status: Safe] — All actuators OFF</a:t>
-            </a:r>
-            <a:endParaRPr lang="en-US" sz="1000" dirty="0"/>
-          </a:p>
-        </p:txBody>
-      </p:sp>
-      <p:sp>
-        <p:nvSpPr>
-          <p:cNvPr id="15" name="Text 13"/>
-          <p:cNvSpPr/>
-          <p:nvPr/>
-        </p:nvSpPr>
-        <p:spPr>
-          <a:xfrm>
-            <a:off x="8183880" y="1481328"/>
-            <a:ext cx="548640" cy="274320"/>
-          </a:xfrm>
-          <a:prstGeom prst="rect">
-            <a:avLst/>
-          </a:prstGeom>
-          <a:noFill/>
-          <a:ln/>
-        </p:spPr>
-        <p:txBody>
-          <a:bodyPr wrap="square" lIns="0" tIns="0" rIns="0" bIns="0" rtlCol="0" anchor="ctr"/>
-          <a:lstStyle/>
-          <a:p>
-            <a:pPr algn="ctr" indent="0" marL="0">
-              <a:buNone/>
-            </a:pPr>
-            <a:r>
-              <a:rPr lang="en-US" sz="1000" b="1" dirty="0">
-                <a:solidFill>
-                  <a:srgbClr val="16A34A"/>
-                </a:solidFill>
-              </a:rPr>
-              <a:t>PASS</a:t>
-            </a:r>
-            <a:endParaRPr lang="en-US" sz="1000" dirty="0"/>
-          </a:p>
-        </p:txBody>
-      </p:sp>
-      <p:sp>
-        <p:nvSpPr>
-          <p:cNvPr id="16" name="Shape 14"/>
-          <p:cNvSpPr/>
-          <p:nvPr/>
-        </p:nvSpPr>
-        <p:spPr>
-          <a:xfrm>
-            <a:off x="457200" y="2029968"/>
-            <a:ext cx="8229600" cy="685800"/>
-          </a:xfrm>
-          <a:prstGeom prst="rect">
-            <a:avLst/>
-          </a:prstGeom>
-          <a:solidFill>
-            <a:srgbClr val="F1F5F9"/>
-          </a:solidFill>
-          <a:ln w="12700">
-            <a:solidFill>
-              <a:srgbClr val="E2E8F0"/>
-            </a:solidFill>
-            <a:prstDash val="solid"/>
-          </a:ln>
-        </p:spPr>
-      </p:sp>
-      <p:sp>
-        <p:nvSpPr>
-          <p:cNvPr id="17" name="Shape 15"/>
-          <p:cNvSpPr/>
-          <p:nvPr/>
-        </p:nvSpPr>
-        <p:spPr>
-          <a:xfrm>
-            <a:off x="457200" y="2029968"/>
-            <a:ext cx="54864" cy="685800"/>
-          </a:xfrm>
-          <a:prstGeom prst="rect">
-            <a:avLst/>
-          </a:prstGeom>
-          <a:solidFill>
-            <a:srgbClr val="EA580C"/>
-          </a:solidFill>
-          <a:ln w="12700">
-            <a:solidFill>
-              <a:srgbClr val="EA580C"/>
-            </a:solidFill>
-            <a:prstDash val="solid"/>
-          </a:ln>
-        </p:spPr>
-      </p:sp>
-      <p:sp>
-        <p:nvSpPr>
-          <p:cNvPr id="18" name="Text 16"/>
-          <p:cNvSpPr/>
-          <p:nvPr/>
-        </p:nvSpPr>
-        <p:spPr>
-          <a:xfrm>
-            <a:off x="566928" y="2075688"/>
-            <a:ext cx="1051560" cy="256032"/>
-          </a:xfrm>
-          <a:prstGeom prst="rect">
-            <a:avLst/>
-          </a:prstGeom>
-          <a:noFill/>
-          <a:ln/>
-        </p:spPr>
-        <p:txBody>
-          <a:bodyPr wrap="square" lIns="0" tIns="0" rIns="0" bIns="0" rtlCol="0" anchor="ctr"/>
-          <a:lstStyle/>
-          <a:p>
-            <a:pPr algn="l" indent="0" marL="0">
-              <a:buNone/>
-            </a:pPr>
-            <a:r>
-              <a:rPr lang="en-US" sz="1100" b="1" dirty="0">
-                <a:solidFill>
-                  <a:srgbClr val="EA580C"/>
-                </a:solidFill>
-              </a:rPr>
-              <a:t>TC-02</a:t>
-            </a:r>
-            <a:endParaRPr lang="en-US" sz="1100" dirty="0"/>
-          </a:p>
-        </p:txBody>
-      </p:sp>
-      <p:sp>
-        <p:nvSpPr>
-          <p:cNvPr id="19" name="Text 17"/>
-          <p:cNvSpPr/>
-          <p:nvPr/>
-        </p:nvSpPr>
-        <p:spPr>
-          <a:xfrm>
-            <a:off x="566928" y="2377440"/>
-            <a:ext cx="1051560" cy="228600"/>
-          </a:xfrm>
-          <a:prstGeom prst="rect">
-            <a:avLst/>
-          </a:prstGeom>
-          <a:noFill/>
-          <a:ln/>
-        </p:spPr>
-        <p:txBody>
-          <a:bodyPr wrap="square" lIns="0" tIns="0" rIns="0" bIns="0" rtlCol="0" anchor="ctr"/>
-          <a:lstStyle/>
-          <a:p>
-            <a:pPr algn="l" indent="0" marL="0">
-              <a:buNone/>
-            </a:pPr>
-            <a:r>
-              <a:rPr lang="en-US" sz="900" dirty="0">
-                <a:solidFill>
-                  <a:srgbClr val="475569"/>
-                </a:solidFill>
-              </a:rPr>
-              <a:t>Heat Stress</a:t>
-            </a:r>
-            <a:endParaRPr lang="en-US" sz="900" dirty="0"/>
-          </a:p>
-        </p:txBody>
-      </p:sp>
-      <p:sp>
-        <p:nvSpPr>
-          <p:cNvPr id="20" name="Text 18"/>
-          <p:cNvSpPr/>
-          <p:nvPr/>
-        </p:nvSpPr>
-        <p:spPr>
-          <a:xfrm>
-            <a:off x="1737360" y="2121408"/>
-            <a:ext cx="2834640" cy="548640"/>
-          </a:xfrm>
-          <a:prstGeom prst="rect">
-            <a:avLst/>
-          </a:prstGeom>
-          <a:noFill/>
-          <a:ln/>
-        </p:spPr>
-        <p:txBody>
-          <a:bodyPr wrap="square" lIns="0" tIns="0" rIns="0" bIns="0" rtlCol="0" anchor="ctr"/>
-          <a:lstStyle/>
-          <a:p>
-            <a:pPr algn="l" indent="0" marL="0">
-              <a:buNone/>
-            </a:pPr>
-            <a:r>
-              <a:rPr lang="en-US" sz="1000" dirty="0">
-                <a:solidFill>
-                  <a:srgbClr val="0F172A"/>
-                </a:solidFill>
-              </a:rPr>
-              <a:t>Temp=39, HR=140, Accel=10, Timer=4</a:t>
-            </a:r>
-            <a:endParaRPr lang="en-US" sz="1000" dirty="0"/>
-          </a:p>
-        </p:txBody>
-      </p:sp>
-      <p:sp>
-        <p:nvSpPr>
-          <p:cNvPr id="21" name="Text 19"/>
-          <p:cNvSpPr/>
-          <p:nvPr/>
-        </p:nvSpPr>
-        <p:spPr>
-          <a:xfrm>
-            <a:off x="4663440" y="2121408"/>
-            <a:ext cx="3291840" cy="548640"/>
-          </a:xfrm>
-          <a:prstGeom prst="rect">
-            <a:avLst/>
-          </a:prstGeom>
-          <a:noFill/>
-          <a:ln/>
-        </p:spPr>
-        <p:txBody>
-          <a:bodyPr wrap="square" lIns="0" tIns="0" rIns="0" bIns="0" rtlCol="0" anchor="ctr"/>
-          <a:lstStyle/>
-          <a:p>
-            <a:pPr algn="l" indent="0" marL="0">
-              <a:buNone/>
-            </a:pPr>
-            <a:r>
-              <a:rPr lang="en-US" sz="1000" dirty="0">
-                <a:solidFill>
-                  <a:srgbClr val="475569"/>
-                </a:solidFill>
-              </a:rPr>
-              <a:t>[Status: Take a break] — Haptic + Fan active</a:t>
-            </a:r>
-            <a:endParaRPr lang="en-US" sz="1000" dirty="0"/>
-          </a:p>
-        </p:txBody>
-      </p:sp>
-      <p:sp>
-        <p:nvSpPr>
-          <p:cNvPr id="22" name="Text 20"/>
-          <p:cNvSpPr/>
-          <p:nvPr/>
-        </p:nvSpPr>
-        <p:spPr>
-          <a:xfrm>
-            <a:off x="8183880" y="2231136"/>
-            <a:ext cx="548640" cy="274320"/>
-          </a:xfrm>
-          <a:prstGeom prst="rect">
-            <a:avLst/>
-          </a:prstGeom>
-          <a:noFill/>
-          <a:ln/>
-        </p:spPr>
-        <p:txBody>
-          <a:bodyPr wrap="square" lIns="0" tIns="0" rIns="0" bIns="0" rtlCol="0" anchor="ctr"/>
-          <a:lstStyle/>
-          <a:p>
-            <a:pPr algn="ctr" indent="0" marL="0">
-              <a:buNone/>
-            </a:pPr>
-            <a:r>
-              <a:rPr lang="en-US" sz="1000" b="1" dirty="0">
-                <a:solidFill>
-                  <a:srgbClr val="16A34A"/>
-                </a:solidFill>
-              </a:rPr>
-              <a:t>PASS</a:t>
-            </a:r>
-            <a:endParaRPr lang="en-US" sz="1000" dirty="0"/>
-          </a:p>
-        </p:txBody>
-      </p:sp>
-      <p:sp>
-        <p:nvSpPr>
-          <p:cNvPr id="23" name="Shape 21"/>
-          <p:cNvSpPr/>
-          <p:nvPr/>
-        </p:nvSpPr>
-        <p:spPr>
-          <a:xfrm>
-            <a:off x="457200" y="2779776"/>
-            <a:ext cx="8229600" cy="685800"/>
-          </a:xfrm>
-          <a:prstGeom prst="rect">
-            <a:avLst/>
-          </a:prstGeom>
-          <a:solidFill>
-            <a:srgbClr val="FFFFFF"/>
-          </a:solidFill>
-          <a:ln w="12700">
-            <a:solidFill>
-              <a:srgbClr val="E2E8F0"/>
-            </a:solidFill>
-            <a:prstDash val="solid"/>
-          </a:ln>
-        </p:spPr>
-      </p:sp>
-      <p:sp>
-        <p:nvSpPr>
-          <p:cNvPr id="24" name="Shape 22"/>
-          <p:cNvSpPr/>
-          <p:nvPr/>
-        </p:nvSpPr>
-        <p:spPr>
-          <a:xfrm>
-            <a:off x="457200" y="2779776"/>
-            <a:ext cx="54864" cy="685800"/>
-          </a:xfrm>
-          <a:prstGeom prst="rect">
-            <a:avLst/>
-          </a:prstGeom>
-          <a:solidFill>
-            <a:srgbClr val="2563EB"/>
-          </a:solidFill>
-          <a:ln w="12700">
-            <a:solidFill>
-              <a:srgbClr val="2563EB"/>
-            </a:solidFill>
-            <a:prstDash val="solid"/>
-          </a:ln>
-        </p:spPr>
-      </p:sp>
-      <p:sp>
-        <p:nvSpPr>
-          <p:cNvPr id="25" name="Text 23"/>
-          <p:cNvSpPr/>
-          <p:nvPr/>
-        </p:nvSpPr>
-        <p:spPr>
-          <a:xfrm>
-            <a:off x="566928" y="2825496"/>
-            <a:ext cx="1051560" cy="256032"/>
-          </a:xfrm>
-          <a:prstGeom prst="rect">
-            <a:avLst/>
-          </a:prstGeom>
-          <a:noFill/>
-          <a:ln/>
-        </p:spPr>
-        <p:txBody>
-          <a:bodyPr wrap="square" lIns="0" tIns="0" rIns="0" bIns="0" rtlCol="0" anchor="ctr"/>
-          <a:lstStyle/>
-          <a:p>
-            <a:pPr algn="l" indent="0" marL="0">
-              <a:buNone/>
-            </a:pPr>
-            <a:r>
-              <a:rPr lang="en-US" sz="1100" b="1" dirty="0">
-                <a:solidFill>
-                  <a:srgbClr val="2563EB"/>
-                </a:solidFill>
-              </a:rPr>
-              <a:t>TC-03</a:t>
-            </a:r>
-            <a:endParaRPr lang="en-US" sz="1100" dirty="0"/>
-          </a:p>
-        </p:txBody>
-      </p:sp>
-      <p:sp>
-        <p:nvSpPr>
-          <p:cNvPr id="26" name="Text 24"/>
-          <p:cNvSpPr/>
-          <p:nvPr/>
-        </p:nvSpPr>
-        <p:spPr>
-          <a:xfrm>
-            <a:off x="566928" y="3127248"/>
-            <a:ext cx="1051560" cy="228600"/>
-          </a:xfrm>
-          <a:prstGeom prst="rect">
-            <a:avLst/>
-          </a:prstGeom>
-          <a:noFill/>
-          <a:ln/>
-        </p:spPr>
-        <p:txBody>
-          <a:bodyPr wrap="square" lIns="0" tIns="0" rIns="0" bIns="0" rtlCol="0" anchor="ctr"/>
-          <a:lstStyle/>
-          <a:p>
-            <a:pPr algn="l" indent="0" marL="0">
-              <a:buNone/>
-            </a:pPr>
-            <a:r>
-              <a:rPr lang="en-US" sz="900" dirty="0">
-                <a:solidFill>
-                  <a:srgbClr val="475569"/>
-                </a:solidFill>
-              </a:rPr>
-              <a:t>Hydration Alert</a:t>
-            </a:r>
-            <a:endParaRPr lang="en-US" sz="900" dirty="0"/>
-          </a:p>
-        </p:txBody>
-      </p:sp>
-      <p:sp>
-        <p:nvSpPr>
-          <p:cNvPr id="27" name="Text 25"/>
-          <p:cNvSpPr/>
-          <p:nvPr/>
-        </p:nvSpPr>
-        <p:spPr>
-          <a:xfrm>
-            <a:off x="1737360" y="2871216"/>
-            <a:ext cx="2834640" cy="548640"/>
-          </a:xfrm>
-          <a:prstGeom prst="rect">
-            <a:avLst/>
-          </a:prstGeom>
-          <a:noFill/>
-          <a:ln/>
-        </p:spPr>
-        <p:txBody>
-          <a:bodyPr wrap="square" lIns="0" tIns="0" rIns="0" bIns="0" rtlCol="0" anchor="ctr"/>
-          <a:lstStyle/>
-          <a:p>
-            <a:pPr algn="l" indent="0" marL="0">
-              <a:buNone/>
-            </a:pPr>
-            <a:r>
-              <a:rPr lang="en-US" sz="1000" dirty="0">
-                <a:solidFill>
-                  <a:srgbClr val="0F172A"/>
-                </a:solidFill>
-              </a:rPr>
-              <a:t>Temp=37, HR=85, Accel=12, Timer=15</a:t>
-            </a:r>
-            <a:endParaRPr lang="en-US" sz="1000" dirty="0"/>
-          </a:p>
-        </p:txBody>
-      </p:sp>
-      <p:sp>
-        <p:nvSpPr>
-          <p:cNvPr id="28" name="Text 26"/>
-          <p:cNvSpPr/>
-          <p:nvPr/>
-        </p:nvSpPr>
-        <p:spPr>
-          <a:xfrm>
-            <a:off x="4663440" y="2871216"/>
-            <a:ext cx="3291840" cy="548640"/>
-          </a:xfrm>
-          <a:prstGeom prst="rect">
-            <a:avLst/>
-          </a:prstGeom>
-          <a:noFill/>
-          <a:ln/>
-        </p:spPr>
-        <p:txBody>
-          <a:bodyPr wrap="square" lIns="0" tIns="0" rIns="0" bIns="0" rtlCol="0" anchor="ctr"/>
-          <a:lstStyle/>
-          <a:p>
-            <a:pPr algn="l" indent="0" marL="0">
-              <a:buNone/>
-            </a:pPr>
-            <a:r>
-              <a:rPr lang="en-US" sz="1000" dirty="0">
-                <a:solidFill>
-                  <a:srgbClr val="475569"/>
-                </a:solidFill>
-              </a:rPr>
-              <a:t>[Drink Water] — LED blink + Haptic + Timer reset</a:t>
-            </a:r>
-            <a:endParaRPr lang="en-US" sz="1000" dirty="0"/>
-          </a:p>
-        </p:txBody>
-      </p:sp>
-      <p:sp>
-        <p:nvSpPr>
-          <p:cNvPr id="29" name="Text 27"/>
-          <p:cNvSpPr/>
-          <p:nvPr/>
-        </p:nvSpPr>
-        <p:spPr>
-          <a:xfrm>
-            <a:off x="8183880" y="2980944"/>
-            <a:ext cx="548640" cy="274320"/>
-          </a:xfrm>
-          <a:prstGeom prst="rect">
-            <a:avLst/>
-          </a:prstGeom>
-          <a:noFill/>
-          <a:ln/>
-        </p:spPr>
-        <p:txBody>
-          <a:bodyPr wrap="square" lIns="0" tIns="0" rIns="0" bIns="0" rtlCol="0" anchor="ctr"/>
-          <a:lstStyle/>
-          <a:p>
-            <a:pPr algn="ctr" indent="0" marL="0">
-              <a:buNone/>
-            </a:pPr>
-            <a:r>
-              <a:rPr lang="en-US" sz="1000" b="1" dirty="0">
-                <a:solidFill>
-                  <a:srgbClr val="16A34A"/>
-                </a:solidFill>
-              </a:rPr>
-              <a:t>PASS</a:t>
-            </a:r>
-            <a:endParaRPr lang="en-US" sz="1000" dirty="0"/>
-          </a:p>
-        </p:txBody>
-      </p:sp>
-      <p:sp>
-        <p:nvSpPr>
-          <p:cNvPr id="30" name="Shape 28"/>
-          <p:cNvSpPr/>
-          <p:nvPr/>
-        </p:nvSpPr>
-        <p:spPr>
-          <a:xfrm>
-            <a:off x="457200" y="3529584"/>
-            <a:ext cx="8229600" cy="685800"/>
-          </a:xfrm>
-          <a:prstGeom prst="rect">
-            <a:avLst/>
-          </a:prstGeom>
-          <a:solidFill>
-            <a:srgbClr val="F1F5F9"/>
-          </a:solidFill>
-          <a:ln w="12700">
-            <a:solidFill>
-              <a:srgbClr val="E2E8F0"/>
-            </a:solidFill>
-            <a:prstDash val="solid"/>
-          </a:ln>
-        </p:spPr>
-      </p:sp>
-      <p:sp>
-        <p:nvSpPr>
-          <p:cNvPr id="31" name="Shape 29"/>
-          <p:cNvSpPr/>
-          <p:nvPr/>
-        </p:nvSpPr>
-        <p:spPr>
-          <a:xfrm>
-            <a:off x="457200" y="3529584"/>
-            <a:ext cx="54864" cy="685800"/>
-          </a:xfrm>
-          <a:prstGeom prst="rect">
-            <a:avLst/>
-          </a:prstGeom>
-          <a:solidFill>
-            <a:srgbClr val="DC2626"/>
-          </a:solidFill>
-          <a:ln w="12700">
-            <a:solidFill>
-              <a:srgbClr val="DC2626"/>
-            </a:solidFill>
-            <a:prstDash val="solid"/>
-          </a:ln>
-        </p:spPr>
-      </p:sp>
-      <p:sp>
-        <p:nvSpPr>
-          <p:cNvPr id="32" name="Text 30"/>
-          <p:cNvSpPr/>
-          <p:nvPr/>
-        </p:nvSpPr>
-        <p:spPr>
-          <a:xfrm>
-            <a:off x="566928" y="3575304"/>
-            <a:ext cx="1051560" cy="256032"/>
-          </a:xfrm>
-          <a:prstGeom prst="rect">
-            <a:avLst/>
-          </a:prstGeom>
-          <a:noFill/>
-          <a:ln/>
-        </p:spPr>
-        <p:txBody>
-          <a:bodyPr wrap="square" lIns="0" tIns="0" rIns="0" bIns="0" rtlCol="0" anchor="ctr"/>
-          <a:lstStyle/>
-          <a:p>
-            <a:pPr algn="l" indent="0" marL="0">
-              <a:buNone/>
-            </a:pPr>
-            <a:r>
-              <a:rPr lang="en-US" sz="1100" b="1" dirty="0">
-                <a:solidFill>
-                  <a:srgbClr val="DC2626"/>
-                </a:solidFill>
-              </a:rPr>
-              <a:t>TC-04</a:t>
-            </a:r>
-            <a:endParaRPr lang="en-US" sz="1100" dirty="0"/>
-          </a:p>
-        </p:txBody>
-      </p:sp>
-      <p:sp>
-        <p:nvSpPr>
-          <p:cNvPr id="33" name="Text 31"/>
-          <p:cNvSpPr/>
-          <p:nvPr/>
-        </p:nvSpPr>
-        <p:spPr>
-          <a:xfrm>
-            <a:off x="566928" y="3877056"/>
-            <a:ext cx="1051560" cy="228600"/>
-          </a:xfrm>
-          <a:prstGeom prst="rect">
-            <a:avLst/>
-          </a:prstGeom>
-          <a:noFill/>
-          <a:ln/>
-        </p:spPr>
-        <p:txBody>
-          <a:bodyPr wrap="square" lIns="0" tIns="0" rIns="0" bIns="0" rtlCol="0" anchor="ctr"/>
-          <a:lstStyle/>
-          <a:p>
-            <a:pPr algn="l" indent="0" marL="0">
-              <a:buNone/>
-            </a:pPr>
-            <a:r>
-              <a:rPr lang="en-US" sz="900" dirty="0">
-                <a:solidFill>
-                  <a:srgbClr val="475569"/>
-                </a:solidFill>
-              </a:rPr>
-              <a:t>Fall / Critical</a:t>
-            </a:r>
-            <a:endParaRPr lang="en-US" sz="900" dirty="0"/>
-          </a:p>
-        </p:txBody>
-      </p:sp>
-      <p:sp>
-        <p:nvSpPr>
-          <p:cNvPr id="34" name="Text 32"/>
-          <p:cNvSpPr/>
-          <p:nvPr/>
-        </p:nvSpPr>
-        <p:spPr>
-          <a:xfrm>
-            <a:off x="1737360" y="3621024"/>
-            <a:ext cx="2834640" cy="548640"/>
-          </a:xfrm>
-          <a:prstGeom prst="rect">
-            <a:avLst/>
-          </a:prstGeom>
-          <a:noFill/>
-          <a:ln/>
-        </p:spPr>
-        <p:txBody>
-          <a:bodyPr wrap="square" lIns="0" tIns="0" rIns="0" bIns="0" rtlCol="0" anchor="ctr"/>
-          <a:lstStyle/>
-          <a:p>
-            <a:pPr algn="l" indent="0" marL="0">
-              <a:buNone/>
-            </a:pPr>
-            <a:r>
-              <a:rPr lang="en-US" sz="1000" dirty="0">
-                <a:solidFill>
-                  <a:srgbClr val="0F172A"/>
-                </a:solidFill>
-              </a:rPr>
-              <a:t>Temp=36, HR=75, Accel=110, Timer=0</a:t>
-            </a:r>
-            <a:endParaRPr lang="en-US" sz="1000" dirty="0"/>
-          </a:p>
-        </p:txBody>
-      </p:sp>
-      <p:sp>
-        <p:nvSpPr>
-          <p:cNvPr id="35" name="Text 33"/>
-          <p:cNvSpPr/>
-          <p:nvPr/>
-        </p:nvSpPr>
-        <p:spPr>
-          <a:xfrm>
-            <a:off x="4663440" y="3621024"/>
-            <a:ext cx="3291840" cy="548640"/>
-          </a:xfrm>
-          <a:prstGeom prst="rect">
-            <a:avLst/>
-          </a:prstGeom>
-          <a:noFill/>
-          <a:ln/>
-        </p:spPr>
-        <p:txBody>
-          <a:bodyPr wrap="square" lIns="0" tIns="0" rIns="0" bIns="0" rtlCol="0" anchor="ctr"/>
-          <a:lstStyle/>
-          <a:p>
-            <a:pPr algn="l" indent="0" marL="0">
-              <a:buNone/>
-            </a:pPr>
-            <a:r>
-              <a:rPr lang="en-US" sz="1000" dirty="0">
-                <a:solidFill>
-                  <a:srgbClr val="475569"/>
-                </a:solidFill>
-              </a:rPr>
-              <a:t>[Status: CRITICAL] — GPS SOS + exit code 10</a:t>
-            </a:r>
-            <a:endParaRPr lang="en-US" sz="1000" dirty="0"/>
-          </a:p>
-        </p:txBody>
-      </p:sp>
-      <p:sp>
-        <p:nvSpPr>
-          <p:cNvPr id="36" name="Text 34"/>
-          <p:cNvSpPr/>
-          <p:nvPr/>
-        </p:nvSpPr>
-        <p:spPr>
-          <a:xfrm>
-            <a:off x="8183880" y="3730752"/>
-            <a:ext cx="548640" cy="274320"/>
-          </a:xfrm>
-          <a:prstGeom prst="rect">
-            <a:avLst/>
-          </a:prstGeom>
-          <a:noFill/>
-          <a:ln/>
-        </p:spPr>
-        <p:txBody>
-          <a:bodyPr wrap="square" lIns="0" tIns="0" rIns="0" bIns="0" rtlCol="0" anchor="ctr"/>
-          <a:lstStyle/>
-          <a:p>
-            <a:pPr algn="ctr" indent="0" marL="0">
-              <a:buNone/>
-            </a:pPr>
-            <a:r>
-              <a:rPr lang="en-US" sz="1000" b="1" dirty="0">
-                <a:solidFill>
-                  <a:srgbClr val="16A34A"/>
-                </a:solidFill>
-              </a:rPr>
-              <a:t>PASS</a:t>
-            </a:r>
-            <a:endParaRPr lang="en-US" sz="1000" dirty="0"/>
-          </a:p>
-        </p:txBody>
-      </p:sp>
-      <p:sp>
-        <p:nvSpPr>
-          <p:cNvPr id="37" name="Shape 35"/>
-          <p:cNvSpPr/>
-          <p:nvPr/>
-        </p:nvSpPr>
-        <p:spPr>
-          <a:xfrm>
-            <a:off x="457200" y="4279392"/>
-            <a:ext cx="8229600" cy="685800"/>
-          </a:xfrm>
-          <a:prstGeom prst="rect">
-            <a:avLst/>
-          </a:prstGeom>
-          <a:solidFill>
-            <a:srgbClr val="FFFFFF"/>
-          </a:solidFill>
-          <a:ln w="12700">
-            <a:solidFill>
-              <a:srgbClr val="E2E8F0"/>
-            </a:solidFill>
-            <a:prstDash val="solid"/>
-          </a:ln>
-        </p:spPr>
-      </p:sp>
-      <p:sp>
-        <p:nvSpPr>
-          <p:cNvPr id="38" name="Shape 36"/>
-          <p:cNvSpPr/>
-          <p:nvPr/>
-        </p:nvSpPr>
-        <p:spPr>
-          <a:xfrm>
-            <a:off x="457200" y="4279392"/>
-            <a:ext cx="54864" cy="685800"/>
-          </a:xfrm>
-          <a:prstGeom prst="rect">
-            <a:avLst/>
-          </a:prstGeom>
-          <a:solidFill>
-            <a:srgbClr val="2563EB"/>
-          </a:solidFill>
-          <a:ln w="12700">
-            <a:solidFill>
-              <a:srgbClr val="2563EB"/>
-            </a:solidFill>
-            <a:prstDash val="solid"/>
-          </a:ln>
-        </p:spPr>
-      </p:sp>
-      <p:sp>
-        <p:nvSpPr>
-          <p:cNvPr id="39" name="Text 37"/>
-          <p:cNvSpPr/>
-          <p:nvPr/>
-        </p:nvSpPr>
-        <p:spPr>
-          <a:xfrm>
-            <a:off x="566928" y="4325112"/>
-            <a:ext cx="1051560" cy="256032"/>
-          </a:xfrm>
-          <a:prstGeom prst="rect">
-            <a:avLst/>
-          </a:prstGeom>
-          <a:noFill/>
-          <a:ln/>
-        </p:spPr>
-        <p:txBody>
-          <a:bodyPr wrap="square" lIns="0" tIns="0" rIns="0" bIns="0" rtlCol="0" anchor="ctr"/>
-          <a:lstStyle/>
-          <a:p>
-            <a:pPr algn="l" indent="0" marL="0">
-              <a:buNone/>
-            </a:pPr>
-            <a:r>
-              <a:rPr lang="en-US" sz="1100" b="1" dirty="0">
-                <a:solidFill>
-                  <a:srgbClr val="2563EB"/>
-                </a:solidFill>
-              </a:rPr>
-              <a:t>TC-05</a:t>
-            </a:r>
-            <a:endParaRPr lang="en-US" sz="1100" dirty="0"/>
-          </a:p>
-        </p:txBody>
-      </p:sp>
-      <p:sp>
-        <p:nvSpPr>
-          <p:cNvPr id="40" name="Text 38"/>
-          <p:cNvSpPr/>
-          <p:nvPr/>
-        </p:nvSpPr>
-        <p:spPr>
-          <a:xfrm>
-            <a:off x="566928" y="4626864"/>
-            <a:ext cx="1051560" cy="228600"/>
-          </a:xfrm>
-          <a:prstGeom prst="rect">
-            <a:avLst/>
-          </a:prstGeom>
-          <a:noFill/>
-          <a:ln/>
-        </p:spPr>
-        <p:txBody>
-          <a:bodyPr wrap="square" lIns="0" tIns="0" rIns="0" bIns="0" rtlCol="0" anchor="ctr"/>
-          <a:lstStyle/>
-          <a:p>
-            <a:pPr algn="l" indent="0" marL="0">
-              <a:buNone/>
-            </a:pPr>
-            <a:r>
-              <a:rPr lang="en-US" sz="900" dirty="0">
-                <a:solidFill>
-                  <a:srgbClr val="475569"/>
-                </a:solidFill>
-              </a:rPr>
-              <a:t>Input Validation</a:t>
-            </a:r>
-            <a:endParaRPr lang="en-US" sz="900" dirty="0"/>
-          </a:p>
-        </p:txBody>
-      </p:sp>
-      <p:sp>
-        <p:nvSpPr>
-          <p:cNvPr id="41" name="Text 39"/>
-          <p:cNvSpPr/>
-          <p:nvPr/>
-        </p:nvSpPr>
-        <p:spPr>
-          <a:xfrm>
-            <a:off x="1737360" y="4370832"/>
-            <a:ext cx="2834640" cy="548640"/>
-          </a:xfrm>
-          <a:prstGeom prst="rect">
-            <a:avLst/>
-          </a:prstGeom>
-          <a:noFill/>
-          <a:ln/>
-        </p:spPr>
-        <p:txBody>
-          <a:bodyPr wrap="square" lIns="0" tIns="0" rIns="0" bIns="0" rtlCol="0" anchor="ctr"/>
-          <a:lstStyle/>
-          <a:p>
-            <a:pPr algn="l" indent="0" marL="0">
-              <a:buNone/>
-            </a:pPr>
-            <a:r>
-              <a:rPr lang="en-US" sz="1000" dirty="0">
-                <a:solidFill>
-                  <a:srgbClr val="0F172A"/>
-                </a:solidFill>
-              </a:rPr>
-              <a:t>Temp=120 (invalid) → retry with 37</a:t>
-            </a:r>
-            <a:endParaRPr lang="en-US" sz="1000" dirty="0"/>
-          </a:p>
-        </p:txBody>
-      </p:sp>
-      <p:sp>
-        <p:nvSpPr>
-          <p:cNvPr id="42" name="Text 40"/>
-          <p:cNvSpPr/>
-          <p:nvPr/>
-        </p:nvSpPr>
-        <p:spPr>
-          <a:xfrm>
-            <a:off x="4663440" y="4370832"/>
-            <a:ext cx="3291840" cy="548640"/>
-          </a:xfrm>
-          <a:prstGeom prst="rect">
-            <a:avLst/>
-          </a:prstGeom>
-          <a:noFill/>
-          <a:ln/>
-        </p:spPr>
-        <p:txBody>
-          <a:bodyPr wrap="square" lIns="0" tIns="0" rIns="0" bIns="0" rtlCol="0" anchor="ctr"/>
-          <a:lstStyle/>
-          <a:p>
-            <a:pPr algn="l" indent="0" marL="0">
-              <a:buNone/>
-            </a:pPr>
-            <a:r>
-              <a:rPr lang="en-US" sz="1000" dirty="0">
-                <a:solidFill>
-                  <a:srgbClr val="475569"/>
-                </a:solidFill>
-              </a:rPr>
-              <a:t>[ERROR] message + re-prompt, then normal flow</a:t>
-            </a:r>
-            <a:endParaRPr lang="en-US" sz="1000" dirty="0"/>
-          </a:p>
-        </p:txBody>
-      </p:sp>
-      <p:sp>
-        <p:nvSpPr>
-          <p:cNvPr id="43" name="Text 41"/>
-          <p:cNvSpPr/>
-          <p:nvPr/>
-        </p:nvSpPr>
-        <p:spPr>
-          <a:xfrm>
-            <a:off x="8183880" y="4480560"/>
-            <a:ext cx="548640" cy="274320"/>
-          </a:xfrm>
-          <a:prstGeom prst="rect">
-            <a:avLst/>
-          </a:prstGeom>
-          <a:noFill/>
-          <a:ln/>
-        </p:spPr>
-        <p:txBody>
-          <a:bodyPr wrap="square" lIns="0" tIns="0" rIns="0" bIns="0" rtlCol="0" anchor="ctr"/>
-          <a:lstStyle/>
-          <a:p>
-            <a:pPr algn="ctr" indent="0" marL="0">
-              <a:buNone/>
-            </a:pPr>
-            <a:r>
-              <a:rPr lang="en-US" sz="1000" b="1" dirty="0">
-                <a:solidFill>
-                  <a:srgbClr val="16A34A"/>
-                </a:solidFill>
-              </a:rPr>
-              <a:t>PASS</a:t>
-            </a:r>
-            <a:endParaRPr lang="en-US" sz="1000" dirty="0"/>
           </a:p>
         </p:txBody>
       </p:sp>
@@ -6521,6 +5404,2177 @@
 <file path=ppt/slides/slide7.xml><?xml version="1.0" encoding="utf-8"?>
 <p:sld xmlns:a="http://schemas.openxmlformats.org/drawingml/2006/main" xmlns:r="http://schemas.openxmlformats.org/officeDocument/2006/relationships" xmlns:p="http://schemas.openxmlformats.org/presentationml/2006/main">
   <p:cSld name="Slide 7">
+    <p:bg>
+      <p:bgPr>
+        <a:solidFill>
+          <a:srgbClr val="F8FAFC"/>
+        </a:solidFill>
+      </p:bgPr>
+    </p:bg>
+    <p:spTree>
+      <p:nvGrpSpPr>
+        <p:cNvPr id="1" name=""/>
+        <p:cNvGrpSpPr/>
+        <p:nvPr/>
+      </p:nvGrpSpPr>
+      <p:grpSpPr>
+        <a:xfrm>
+          <a:off x="0" y="0"/>
+          <a:ext cx="0" cy="0"/>
+          <a:chOff x="0" y="0"/>
+          <a:chExt cx="0" cy="0"/>
+        </a:xfrm>
+      </p:grpSpPr>
+      <p:sp>
+        <p:nvSpPr>
+          <p:cNvPr id="2" name="Text 0"/>
+          <p:cNvSpPr/>
+          <p:nvPr/>
+        </p:nvSpPr>
+        <p:spPr>
+          <a:xfrm>
+            <a:off x="457200" y="228600"/>
+            <a:ext cx="8229600" cy="502920"/>
+          </a:xfrm>
+          <a:prstGeom prst="rect">
+            <a:avLst/>
+          </a:prstGeom>
+          <a:noFill/>
+          <a:ln/>
+        </p:spPr>
+        <p:txBody>
+          <a:bodyPr wrap="square" lIns="0" tIns="0" rIns="0" bIns="0" rtlCol="0" anchor="ctr"/>
+          <a:lstStyle/>
+          <a:p>
+            <a:pPr algn="l" indent="0" marL="0">
+              <a:buNone/>
+            </a:pPr>
+            <a:r>
+              <a:rPr lang="en-US" sz="3000" b="1" dirty="0">
+                <a:solidFill>
+                  <a:srgbClr val="0F172A"/>
+                </a:solidFill>
+                <a:latin typeface="Arial Black" pitchFamily="34" charset="0"/>
+                <a:ea typeface="Arial Black" pitchFamily="34" charset="-122"/>
+                <a:cs typeface="Arial Black" pitchFamily="34" charset="-120"/>
+              </a:rPr>
+              <a:t>Test Case Results</a:t>
+            </a:r>
+            <a:endParaRPr lang="en-US" sz="3000" dirty="0"/>
+          </a:p>
+        </p:txBody>
+      </p:sp>
+      <p:sp>
+        <p:nvSpPr>
+          <p:cNvPr id="3" name="Shape 1"/>
+          <p:cNvSpPr/>
+          <p:nvPr/>
+        </p:nvSpPr>
+        <p:spPr>
+          <a:xfrm>
+            <a:off x="457200" y="777240"/>
+            <a:ext cx="8229600" cy="27432"/>
+          </a:xfrm>
+          <a:prstGeom prst="rect">
+            <a:avLst/>
+          </a:prstGeom>
+          <a:solidFill>
+            <a:srgbClr val="0EA5E9"/>
+          </a:solidFill>
+          <a:ln w="12700">
+            <a:solidFill>
+              <a:srgbClr val="0EA5E9"/>
+            </a:solidFill>
+            <a:prstDash val="solid"/>
+          </a:ln>
+        </p:spPr>
+      </p:sp>
+      <p:sp>
+        <p:nvSpPr>
+          <p:cNvPr id="4" name="Shape 2"/>
+          <p:cNvSpPr/>
+          <p:nvPr/>
+        </p:nvSpPr>
+        <p:spPr>
+          <a:xfrm>
+            <a:off x="457200" y="914400"/>
+            <a:ext cx="8229600" cy="347472"/>
+          </a:xfrm>
+          <a:prstGeom prst="rect">
+            <a:avLst/>
+          </a:prstGeom>
+          <a:solidFill>
+            <a:srgbClr val="111827"/>
+          </a:solidFill>
+          <a:ln w="12700">
+            <a:solidFill>
+              <a:srgbClr val="111827"/>
+            </a:solidFill>
+            <a:prstDash val="solid"/>
+          </a:ln>
+        </p:spPr>
+      </p:sp>
+      <p:sp>
+        <p:nvSpPr>
+          <p:cNvPr id="5" name="Text 3"/>
+          <p:cNvSpPr/>
+          <p:nvPr/>
+        </p:nvSpPr>
+        <p:spPr>
+          <a:xfrm>
+            <a:off x="548640" y="960120"/>
+            <a:ext cx="1097280" cy="256032"/>
+          </a:xfrm>
+          <a:prstGeom prst="rect">
+            <a:avLst/>
+          </a:prstGeom>
+          <a:noFill/>
+          <a:ln/>
+        </p:spPr>
+        <p:txBody>
+          <a:bodyPr wrap="square" lIns="0" tIns="0" rIns="0" bIns="0" rtlCol="0" anchor="ctr"/>
+          <a:lstStyle/>
+          <a:p>
+            <a:pPr algn="l" indent="0" marL="0">
+              <a:buNone/>
+            </a:pPr>
+            <a:r>
+              <a:rPr lang="en-US" sz="1100" b="1" dirty="0">
+                <a:solidFill>
+                  <a:srgbClr val="FFFFFF"/>
+                </a:solidFill>
+              </a:rPr>
+              <a:t>Test Case</a:t>
+            </a:r>
+            <a:endParaRPr lang="en-US" sz="1100" dirty="0"/>
+          </a:p>
+        </p:txBody>
+      </p:sp>
+      <p:sp>
+        <p:nvSpPr>
+          <p:cNvPr id="6" name="Text 4"/>
+          <p:cNvSpPr/>
+          <p:nvPr/>
+        </p:nvSpPr>
+        <p:spPr>
+          <a:xfrm>
+            <a:off x="1737360" y="960120"/>
+            <a:ext cx="2834640" cy="256032"/>
+          </a:xfrm>
+          <a:prstGeom prst="rect">
+            <a:avLst/>
+          </a:prstGeom>
+          <a:noFill/>
+          <a:ln/>
+        </p:spPr>
+        <p:txBody>
+          <a:bodyPr wrap="square" lIns="0" tIns="0" rIns="0" bIns="0" rtlCol="0" anchor="ctr"/>
+          <a:lstStyle/>
+          <a:p>
+            <a:pPr algn="l" indent="0" marL="0">
+              <a:buNone/>
+            </a:pPr>
+            <a:r>
+              <a:rPr lang="en-US" sz="1100" b="1" dirty="0">
+                <a:solidFill>
+                  <a:srgbClr val="FFFFFF"/>
+                </a:solidFill>
+              </a:rPr>
+              <a:t>Inputs</a:t>
+            </a:r>
+            <a:endParaRPr lang="en-US" sz="1100" dirty="0"/>
+          </a:p>
+        </p:txBody>
+      </p:sp>
+      <p:sp>
+        <p:nvSpPr>
+          <p:cNvPr id="7" name="Text 5"/>
+          <p:cNvSpPr/>
+          <p:nvPr/>
+        </p:nvSpPr>
+        <p:spPr>
+          <a:xfrm>
+            <a:off x="4663440" y="960120"/>
+            <a:ext cx="3291840" cy="256032"/>
+          </a:xfrm>
+          <a:prstGeom prst="rect">
+            <a:avLst/>
+          </a:prstGeom>
+          <a:noFill/>
+          <a:ln/>
+        </p:spPr>
+        <p:txBody>
+          <a:bodyPr wrap="square" lIns="0" tIns="0" rIns="0" bIns="0" rtlCol="0" anchor="ctr"/>
+          <a:lstStyle/>
+          <a:p>
+            <a:pPr algn="l" indent="0" marL="0">
+              <a:buNone/>
+            </a:pPr>
+            <a:r>
+              <a:rPr lang="en-US" sz="1100" b="1" dirty="0">
+                <a:solidFill>
+                  <a:srgbClr val="FFFFFF"/>
+                </a:solidFill>
+              </a:rPr>
+              <a:t>Expected Output</a:t>
+            </a:r>
+            <a:endParaRPr lang="en-US" sz="1100" dirty="0"/>
+          </a:p>
+        </p:txBody>
+      </p:sp>
+      <p:sp>
+        <p:nvSpPr>
+          <p:cNvPr id="8" name="Text 6"/>
+          <p:cNvSpPr/>
+          <p:nvPr/>
+        </p:nvSpPr>
+        <p:spPr>
+          <a:xfrm>
+            <a:off x="8229600" y="960120"/>
+            <a:ext cx="457200" cy="256032"/>
+          </a:xfrm>
+          <a:prstGeom prst="rect">
+            <a:avLst/>
+          </a:prstGeom>
+          <a:noFill/>
+          <a:ln/>
+        </p:spPr>
+        <p:txBody>
+          <a:bodyPr wrap="square" lIns="0" tIns="0" rIns="0" bIns="0" rtlCol="0" anchor="ctr"/>
+          <a:lstStyle/>
+          <a:p>
+            <a:pPr algn="ctr" indent="0" marL="0">
+              <a:buNone/>
+            </a:pPr>
+            <a:r>
+              <a:rPr lang="en-US" sz="1100" b="1" dirty="0">
+                <a:solidFill>
+                  <a:srgbClr val="FFFFFF"/>
+                </a:solidFill>
+              </a:rPr>
+              <a:t>✓</a:t>
+            </a:r>
+            <a:endParaRPr lang="en-US" sz="1100" dirty="0"/>
+          </a:p>
+        </p:txBody>
+      </p:sp>
+      <p:sp>
+        <p:nvSpPr>
+          <p:cNvPr id="9" name="Shape 7"/>
+          <p:cNvSpPr/>
+          <p:nvPr/>
+        </p:nvSpPr>
+        <p:spPr>
+          <a:xfrm>
+            <a:off x="457200" y="1280160"/>
+            <a:ext cx="8229600" cy="685800"/>
+          </a:xfrm>
+          <a:prstGeom prst="rect">
+            <a:avLst/>
+          </a:prstGeom>
+          <a:solidFill>
+            <a:srgbClr val="FFFFFF"/>
+          </a:solidFill>
+          <a:ln w="12700">
+            <a:solidFill>
+              <a:srgbClr val="E2E8F0"/>
+            </a:solidFill>
+            <a:prstDash val="solid"/>
+          </a:ln>
+        </p:spPr>
+      </p:sp>
+      <p:sp>
+        <p:nvSpPr>
+          <p:cNvPr id="10" name="Shape 8"/>
+          <p:cNvSpPr/>
+          <p:nvPr/>
+        </p:nvSpPr>
+        <p:spPr>
+          <a:xfrm>
+            <a:off x="457200" y="1280160"/>
+            <a:ext cx="54864" cy="685800"/>
+          </a:xfrm>
+          <a:prstGeom prst="rect">
+            <a:avLst/>
+          </a:prstGeom>
+          <a:solidFill>
+            <a:srgbClr val="16A34A"/>
+          </a:solidFill>
+          <a:ln w="12700">
+            <a:solidFill>
+              <a:srgbClr val="16A34A"/>
+            </a:solidFill>
+            <a:prstDash val="solid"/>
+          </a:ln>
+        </p:spPr>
+      </p:sp>
+      <p:sp>
+        <p:nvSpPr>
+          <p:cNvPr id="11" name="Text 9"/>
+          <p:cNvSpPr/>
+          <p:nvPr/>
+        </p:nvSpPr>
+        <p:spPr>
+          <a:xfrm>
+            <a:off x="566928" y="1325880"/>
+            <a:ext cx="1051560" cy="256032"/>
+          </a:xfrm>
+          <a:prstGeom prst="rect">
+            <a:avLst/>
+          </a:prstGeom>
+          <a:noFill/>
+          <a:ln/>
+        </p:spPr>
+        <p:txBody>
+          <a:bodyPr wrap="square" lIns="0" tIns="0" rIns="0" bIns="0" rtlCol="0" anchor="ctr"/>
+          <a:lstStyle/>
+          <a:p>
+            <a:pPr algn="l" indent="0" marL="0">
+              <a:buNone/>
+            </a:pPr>
+            <a:r>
+              <a:rPr lang="en-US" sz="1100" b="1" dirty="0">
+                <a:solidFill>
+                  <a:srgbClr val="16A34A"/>
+                </a:solidFill>
+              </a:rPr>
+              <a:t>TC-01</a:t>
+            </a:r>
+            <a:endParaRPr lang="en-US" sz="1100" dirty="0"/>
+          </a:p>
+        </p:txBody>
+      </p:sp>
+      <p:sp>
+        <p:nvSpPr>
+          <p:cNvPr id="12" name="Text 10"/>
+          <p:cNvSpPr/>
+          <p:nvPr/>
+        </p:nvSpPr>
+        <p:spPr>
+          <a:xfrm>
+            <a:off x="566928" y="1627632"/>
+            <a:ext cx="1051560" cy="228600"/>
+          </a:xfrm>
+          <a:prstGeom prst="rect">
+            <a:avLst/>
+          </a:prstGeom>
+          <a:noFill/>
+          <a:ln/>
+        </p:spPr>
+        <p:txBody>
+          <a:bodyPr wrap="square" lIns="0" tIns="0" rIns="0" bIns="0" rtlCol="0" anchor="ctr"/>
+          <a:lstStyle/>
+          <a:p>
+            <a:pPr algn="l" indent="0" marL="0">
+              <a:buNone/>
+            </a:pPr>
+            <a:r>
+              <a:rPr lang="en-US" sz="900" dirty="0">
+                <a:solidFill>
+                  <a:srgbClr val="475569"/>
+                </a:solidFill>
+              </a:rPr>
+              <a:t>Normal Safe</a:t>
+            </a:r>
+            <a:endParaRPr lang="en-US" sz="900" dirty="0"/>
+          </a:p>
+        </p:txBody>
+      </p:sp>
+      <p:sp>
+        <p:nvSpPr>
+          <p:cNvPr id="13" name="Text 11"/>
+          <p:cNvSpPr/>
+          <p:nvPr/>
+        </p:nvSpPr>
+        <p:spPr>
+          <a:xfrm>
+            <a:off x="1737360" y="1371600"/>
+            <a:ext cx="2834640" cy="548640"/>
+          </a:xfrm>
+          <a:prstGeom prst="rect">
+            <a:avLst/>
+          </a:prstGeom>
+          <a:noFill/>
+          <a:ln/>
+        </p:spPr>
+        <p:txBody>
+          <a:bodyPr wrap="square" lIns="0" tIns="0" rIns="0" bIns="0" rtlCol="0" anchor="ctr"/>
+          <a:lstStyle/>
+          <a:p>
+            <a:pPr algn="l" indent="0" marL="0">
+              <a:buNone/>
+            </a:pPr>
+            <a:r>
+              <a:rPr lang="en-US" sz="1000" dirty="0">
+                <a:solidFill>
+                  <a:srgbClr val="0F172A"/>
+                </a:solidFill>
+              </a:rPr>
+              <a:t>Temp=36, HR=80, Accel=15, Timer=2</a:t>
+            </a:r>
+            <a:endParaRPr lang="en-US" sz="1000" dirty="0"/>
+          </a:p>
+        </p:txBody>
+      </p:sp>
+      <p:sp>
+        <p:nvSpPr>
+          <p:cNvPr id="14" name="Text 12"/>
+          <p:cNvSpPr/>
+          <p:nvPr/>
+        </p:nvSpPr>
+        <p:spPr>
+          <a:xfrm>
+            <a:off x="4663440" y="1371600"/>
+            <a:ext cx="3291840" cy="548640"/>
+          </a:xfrm>
+          <a:prstGeom prst="rect">
+            <a:avLst/>
+          </a:prstGeom>
+          <a:noFill/>
+          <a:ln/>
+        </p:spPr>
+        <p:txBody>
+          <a:bodyPr wrap="square" lIns="0" tIns="0" rIns="0" bIns="0" rtlCol="0" anchor="ctr"/>
+          <a:lstStyle/>
+          <a:p>
+            <a:pPr algn="l" indent="0" marL="0">
+              <a:buNone/>
+            </a:pPr>
+            <a:r>
+              <a:rPr lang="en-US" sz="1000" dirty="0">
+                <a:solidFill>
+                  <a:srgbClr val="475569"/>
+                </a:solidFill>
+              </a:rPr>
+              <a:t>[Status: Safe] — All actuators OFF</a:t>
+            </a:r>
+            <a:endParaRPr lang="en-US" sz="1000" dirty="0"/>
+          </a:p>
+        </p:txBody>
+      </p:sp>
+      <p:sp>
+        <p:nvSpPr>
+          <p:cNvPr id="15" name="Text 13"/>
+          <p:cNvSpPr/>
+          <p:nvPr/>
+        </p:nvSpPr>
+        <p:spPr>
+          <a:xfrm>
+            <a:off x="8183880" y="1481328"/>
+            <a:ext cx="548640" cy="274320"/>
+          </a:xfrm>
+          <a:prstGeom prst="rect">
+            <a:avLst/>
+          </a:prstGeom>
+          <a:noFill/>
+          <a:ln/>
+        </p:spPr>
+        <p:txBody>
+          <a:bodyPr wrap="square" lIns="0" tIns="0" rIns="0" bIns="0" rtlCol="0" anchor="ctr"/>
+          <a:lstStyle/>
+          <a:p>
+            <a:pPr algn="ctr" indent="0" marL="0">
+              <a:buNone/>
+            </a:pPr>
+            <a:r>
+              <a:rPr lang="en-US" sz="1000" b="1" dirty="0">
+                <a:solidFill>
+                  <a:srgbClr val="16A34A"/>
+                </a:solidFill>
+              </a:rPr>
+              <a:t>PASS</a:t>
+            </a:r>
+            <a:endParaRPr lang="en-US" sz="1000" dirty="0"/>
+          </a:p>
+        </p:txBody>
+      </p:sp>
+      <p:sp>
+        <p:nvSpPr>
+          <p:cNvPr id="16" name="Shape 14"/>
+          <p:cNvSpPr/>
+          <p:nvPr/>
+        </p:nvSpPr>
+        <p:spPr>
+          <a:xfrm>
+            <a:off x="457200" y="2029968"/>
+            <a:ext cx="8229600" cy="685800"/>
+          </a:xfrm>
+          <a:prstGeom prst="rect">
+            <a:avLst/>
+          </a:prstGeom>
+          <a:solidFill>
+            <a:srgbClr val="F1F5F9"/>
+          </a:solidFill>
+          <a:ln w="12700">
+            <a:solidFill>
+              <a:srgbClr val="E2E8F0"/>
+            </a:solidFill>
+            <a:prstDash val="solid"/>
+          </a:ln>
+        </p:spPr>
+      </p:sp>
+      <p:sp>
+        <p:nvSpPr>
+          <p:cNvPr id="17" name="Shape 15"/>
+          <p:cNvSpPr/>
+          <p:nvPr/>
+        </p:nvSpPr>
+        <p:spPr>
+          <a:xfrm>
+            <a:off x="457200" y="2029968"/>
+            <a:ext cx="54864" cy="685800"/>
+          </a:xfrm>
+          <a:prstGeom prst="rect">
+            <a:avLst/>
+          </a:prstGeom>
+          <a:solidFill>
+            <a:srgbClr val="EA580C"/>
+          </a:solidFill>
+          <a:ln w="12700">
+            <a:solidFill>
+              <a:srgbClr val="EA580C"/>
+            </a:solidFill>
+            <a:prstDash val="solid"/>
+          </a:ln>
+        </p:spPr>
+      </p:sp>
+      <p:sp>
+        <p:nvSpPr>
+          <p:cNvPr id="18" name="Text 16"/>
+          <p:cNvSpPr/>
+          <p:nvPr/>
+        </p:nvSpPr>
+        <p:spPr>
+          <a:xfrm>
+            <a:off x="566928" y="2075688"/>
+            <a:ext cx="1051560" cy="256032"/>
+          </a:xfrm>
+          <a:prstGeom prst="rect">
+            <a:avLst/>
+          </a:prstGeom>
+          <a:noFill/>
+          <a:ln/>
+        </p:spPr>
+        <p:txBody>
+          <a:bodyPr wrap="square" lIns="0" tIns="0" rIns="0" bIns="0" rtlCol="0" anchor="ctr"/>
+          <a:lstStyle/>
+          <a:p>
+            <a:pPr algn="l" indent="0" marL="0">
+              <a:buNone/>
+            </a:pPr>
+            <a:r>
+              <a:rPr lang="en-US" sz="1100" b="1" dirty="0">
+                <a:solidFill>
+                  <a:srgbClr val="EA580C"/>
+                </a:solidFill>
+              </a:rPr>
+              <a:t>TC-02</a:t>
+            </a:r>
+            <a:endParaRPr lang="en-US" sz="1100" dirty="0"/>
+          </a:p>
+        </p:txBody>
+      </p:sp>
+      <p:sp>
+        <p:nvSpPr>
+          <p:cNvPr id="19" name="Text 17"/>
+          <p:cNvSpPr/>
+          <p:nvPr/>
+        </p:nvSpPr>
+        <p:spPr>
+          <a:xfrm>
+            <a:off x="566928" y="2377440"/>
+            <a:ext cx="1051560" cy="228600"/>
+          </a:xfrm>
+          <a:prstGeom prst="rect">
+            <a:avLst/>
+          </a:prstGeom>
+          <a:noFill/>
+          <a:ln/>
+        </p:spPr>
+        <p:txBody>
+          <a:bodyPr wrap="square" lIns="0" tIns="0" rIns="0" bIns="0" rtlCol="0" anchor="ctr"/>
+          <a:lstStyle/>
+          <a:p>
+            <a:pPr algn="l" indent="0" marL="0">
+              <a:buNone/>
+            </a:pPr>
+            <a:r>
+              <a:rPr lang="en-US" sz="900" dirty="0">
+                <a:solidFill>
+                  <a:srgbClr val="475569"/>
+                </a:solidFill>
+              </a:rPr>
+              <a:t>Heat Stress</a:t>
+            </a:r>
+            <a:endParaRPr lang="en-US" sz="900" dirty="0"/>
+          </a:p>
+        </p:txBody>
+      </p:sp>
+      <p:sp>
+        <p:nvSpPr>
+          <p:cNvPr id="20" name="Text 18"/>
+          <p:cNvSpPr/>
+          <p:nvPr/>
+        </p:nvSpPr>
+        <p:spPr>
+          <a:xfrm>
+            <a:off x="1737360" y="2121408"/>
+            <a:ext cx="2834640" cy="548640"/>
+          </a:xfrm>
+          <a:prstGeom prst="rect">
+            <a:avLst/>
+          </a:prstGeom>
+          <a:noFill/>
+          <a:ln/>
+        </p:spPr>
+        <p:txBody>
+          <a:bodyPr wrap="square" lIns="0" tIns="0" rIns="0" bIns="0" rtlCol="0" anchor="ctr"/>
+          <a:lstStyle/>
+          <a:p>
+            <a:pPr algn="l" indent="0" marL="0">
+              <a:buNone/>
+            </a:pPr>
+            <a:r>
+              <a:rPr lang="en-US" sz="1000" dirty="0">
+                <a:solidFill>
+                  <a:srgbClr val="0F172A"/>
+                </a:solidFill>
+              </a:rPr>
+              <a:t>Temp=39, HR=140, Accel=10, Timer=4</a:t>
+            </a:r>
+            <a:endParaRPr lang="en-US" sz="1000" dirty="0"/>
+          </a:p>
+        </p:txBody>
+      </p:sp>
+      <p:sp>
+        <p:nvSpPr>
+          <p:cNvPr id="21" name="Text 19"/>
+          <p:cNvSpPr/>
+          <p:nvPr/>
+        </p:nvSpPr>
+        <p:spPr>
+          <a:xfrm>
+            <a:off x="4663440" y="2121408"/>
+            <a:ext cx="3291840" cy="548640"/>
+          </a:xfrm>
+          <a:prstGeom prst="rect">
+            <a:avLst/>
+          </a:prstGeom>
+          <a:noFill/>
+          <a:ln/>
+        </p:spPr>
+        <p:txBody>
+          <a:bodyPr wrap="square" lIns="0" tIns="0" rIns="0" bIns="0" rtlCol="0" anchor="ctr"/>
+          <a:lstStyle/>
+          <a:p>
+            <a:pPr algn="l" indent="0" marL="0">
+              <a:buNone/>
+            </a:pPr>
+            <a:r>
+              <a:rPr lang="en-US" sz="1000" dirty="0">
+                <a:solidFill>
+                  <a:srgbClr val="475569"/>
+                </a:solidFill>
+              </a:rPr>
+              <a:t>[Status: Take a break] — Haptic + Fan active</a:t>
+            </a:r>
+            <a:endParaRPr lang="en-US" sz="1000" dirty="0"/>
+          </a:p>
+        </p:txBody>
+      </p:sp>
+      <p:sp>
+        <p:nvSpPr>
+          <p:cNvPr id="22" name="Text 20"/>
+          <p:cNvSpPr/>
+          <p:nvPr/>
+        </p:nvSpPr>
+        <p:spPr>
+          <a:xfrm>
+            <a:off x="8183880" y="2231136"/>
+            <a:ext cx="548640" cy="274320"/>
+          </a:xfrm>
+          <a:prstGeom prst="rect">
+            <a:avLst/>
+          </a:prstGeom>
+          <a:noFill/>
+          <a:ln/>
+        </p:spPr>
+        <p:txBody>
+          <a:bodyPr wrap="square" lIns="0" tIns="0" rIns="0" bIns="0" rtlCol="0" anchor="ctr"/>
+          <a:lstStyle/>
+          <a:p>
+            <a:pPr algn="ctr" indent="0" marL="0">
+              <a:buNone/>
+            </a:pPr>
+            <a:r>
+              <a:rPr lang="en-US" sz="1000" b="1" dirty="0">
+                <a:solidFill>
+                  <a:srgbClr val="16A34A"/>
+                </a:solidFill>
+              </a:rPr>
+              <a:t>PASS</a:t>
+            </a:r>
+            <a:endParaRPr lang="en-US" sz="1000" dirty="0"/>
+          </a:p>
+        </p:txBody>
+      </p:sp>
+      <p:sp>
+        <p:nvSpPr>
+          <p:cNvPr id="23" name="Shape 21"/>
+          <p:cNvSpPr/>
+          <p:nvPr/>
+        </p:nvSpPr>
+        <p:spPr>
+          <a:xfrm>
+            <a:off x="457200" y="2779776"/>
+            <a:ext cx="8229600" cy="685800"/>
+          </a:xfrm>
+          <a:prstGeom prst="rect">
+            <a:avLst/>
+          </a:prstGeom>
+          <a:solidFill>
+            <a:srgbClr val="FFFFFF"/>
+          </a:solidFill>
+          <a:ln w="12700">
+            <a:solidFill>
+              <a:srgbClr val="E2E8F0"/>
+            </a:solidFill>
+            <a:prstDash val="solid"/>
+          </a:ln>
+        </p:spPr>
+      </p:sp>
+      <p:sp>
+        <p:nvSpPr>
+          <p:cNvPr id="24" name="Shape 22"/>
+          <p:cNvSpPr/>
+          <p:nvPr/>
+        </p:nvSpPr>
+        <p:spPr>
+          <a:xfrm>
+            <a:off x="457200" y="2779776"/>
+            <a:ext cx="54864" cy="685800"/>
+          </a:xfrm>
+          <a:prstGeom prst="rect">
+            <a:avLst/>
+          </a:prstGeom>
+          <a:solidFill>
+            <a:srgbClr val="2563EB"/>
+          </a:solidFill>
+          <a:ln w="12700">
+            <a:solidFill>
+              <a:srgbClr val="2563EB"/>
+            </a:solidFill>
+            <a:prstDash val="solid"/>
+          </a:ln>
+        </p:spPr>
+      </p:sp>
+      <p:sp>
+        <p:nvSpPr>
+          <p:cNvPr id="25" name="Text 23"/>
+          <p:cNvSpPr/>
+          <p:nvPr/>
+        </p:nvSpPr>
+        <p:spPr>
+          <a:xfrm>
+            <a:off x="566928" y="2825496"/>
+            <a:ext cx="1051560" cy="256032"/>
+          </a:xfrm>
+          <a:prstGeom prst="rect">
+            <a:avLst/>
+          </a:prstGeom>
+          <a:noFill/>
+          <a:ln/>
+        </p:spPr>
+        <p:txBody>
+          <a:bodyPr wrap="square" lIns="0" tIns="0" rIns="0" bIns="0" rtlCol="0" anchor="ctr"/>
+          <a:lstStyle/>
+          <a:p>
+            <a:pPr algn="l" indent="0" marL="0">
+              <a:buNone/>
+            </a:pPr>
+            <a:r>
+              <a:rPr lang="en-US" sz="1100" b="1" dirty="0">
+                <a:solidFill>
+                  <a:srgbClr val="2563EB"/>
+                </a:solidFill>
+              </a:rPr>
+              <a:t>TC-03</a:t>
+            </a:r>
+            <a:endParaRPr lang="en-US" sz="1100" dirty="0"/>
+          </a:p>
+        </p:txBody>
+      </p:sp>
+      <p:sp>
+        <p:nvSpPr>
+          <p:cNvPr id="26" name="Text 24"/>
+          <p:cNvSpPr/>
+          <p:nvPr/>
+        </p:nvSpPr>
+        <p:spPr>
+          <a:xfrm>
+            <a:off x="566928" y="3127248"/>
+            <a:ext cx="1051560" cy="228600"/>
+          </a:xfrm>
+          <a:prstGeom prst="rect">
+            <a:avLst/>
+          </a:prstGeom>
+          <a:noFill/>
+          <a:ln/>
+        </p:spPr>
+        <p:txBody>
+          <a:bodyPr wrap="square" lIns="0" tIns="0" rIns="0" bIns="0" rtlCol="0" anchor="ctr"/>
+          <a:lstStyle/>
+          <a:p>
+            <a:pPr algn="l" indent="0" marL="0">
+              <a:buNone/>
+            </a:pPr>
+            <a:r>
+              <a:rPr lang="en-US" sz="900" dirty="0">
+                <a:solidFill>
+                  <a:srgbClr val="475569"/>
+                </a:solidFill>
+              </a:rPr>
+              <a:t>Hydration Alert</a:t>
+            </a:r>
+            <a:endParaRPr lang="en-US" sz="900" dirty="0"/>
+          </a:p>
+        </p:txBody>
+      </p:sp>
+      <p:sp>
+        <p:nvSpPr>
+          <p:cNvPr id="27" name="Text 25"/>
+          <p:cNvSpPr/>
+          <p:nvPr/>
+        </p:nvSpPr>
+        <p:spPr>
+          <a:xfrm>
+            <a:off x="1737360" y="2871216"/>
+            <a:ext cx="2834640" cy="548640"/>
+          </a:xfrm>
+          <a:prstGeom prst="rect">
+            <a:avLst/>
+          </a:prstGeom>
+          <a:noFill/>
+          <a:ln/>
+        </p:spPr>
+        <p:txBody>
+          <a:bodyPr wrap="square" lIns="0" tIns="0" rIns="0" bIns="0" rtlCol="0" anchor="ctr"/>
+          <a:lstStyle/>
+          <a:p>
+            <a:pPr algn="l" indent="0" marL="0">
+              <a:buNone/>
+            </a:pPr>
+            <a:r>
+              <a:rPr lang="en-US" sz="1000" dirty="0">
+                <a:solidFill>
+                  <a:srgbClr val="0F172A"/>
+                </a:solidFill>
+              </a:rPr>
+              <a:t>Temp=37, HR=85, Accel=12, Timer=15</a:t>
+            </a:r>
+            <a:endParaRPr lang="en-US" sz="1000" dirty="0"/>
+          </a:p>
+        </p:txBody>
+      </p:sp>
+      <p:sp>
+        <p:nvSpPr>
+          <p:cNvPr id="28" name="Text 26"/>
+          <p:cNvSpPr/>
+          <p:nvPr/>
+        </p:nvSpPr>
+        <p:spPr>
+          <a:xfrm>
+            <a:off x="4663440" y="2871216"/>
+            <a:ext cx="3291840" cy="548640"/>
+          </a:xfrm>
+          <a:prstGeom prst="rect">
+            <a:avLst/>
+          </a:prstGeom>
+          <a:noFill/>
+          <a:ln/>
+        </p:spPr>
+        <p:txBody>
+          <a:bodyPr wrap="square" lIns="0" tIns="0" rIns="0" bIns="0" rtlCol="0" anchor="ctr"/>
+          <a:lstStyle/>
+          <a:p>
+            <a:pPr algn="l" indent="0" marL="0">
+              <a:buNone/>
+            </a:pPr>
+            <a:r>
+              <a:rPr lang="en-US" sz="1000" dirty="0">
+                <a:solidFill>
+                  <a:srgbClr val="475569"/>
+                </a:solidFill>
+              </a:rPr>
+              <a:t>[Drink Water] — LED blink + Haptic + Timer reset</a:t>
+            </a:r>
+            <a:endParaRPr lang="en-US" sz="1000" dirty="0"/>
+          </a:p>
+        </p:txBody>
+      </p:sp>
+      <p:sp>
+        <p:nvSpPr>
+          <p:cNvPr id="29" name="Text 27"/>
+          <p:cNvSpPr/>
+          <p:nvPr/>
+        </p:nvSpPr>
+        <p:spPr>
+          <a:xfrm>
+            <a:off x="8183880" y="2980944"/>
+            <a:ext cx="548640" cy="274320"/>
+          </a:xfrm>
+          <a:prstGeom prst="rect">
+            <a:avLst/>
+          </a:prstGeom>
+          <a:noFill/>
+          <a:ln/>
+        </p:spPr>
+        <p:txBody>
+          <a:bodyPr wrap="square" lIns="0" tIns="0" rIns="0" bIns="0" rtlCol="0" anchor="ctr"/>
+          <a:lstStyle/>
+          <a:p>
+            <a:pPr algn="ctr" indent="0" marL="0">
+              <a:buNone/>
+            </a:pPr>
+            <a:r>
+              <a:rPr lang="en-US" sz="1000" b="1" dirty="0">
+                <a:solidFill>
+                  <a:srgbClr val="16A34A"/>
+                </a:solidFill>
+              </a:rPr>
+              <a:t>PASS</a:t>
+            </a:r>
+            <a:endParaRPr lang="en-US" sz="1000" dirty="0"/>
+          </a:p>
+        </p:txBody>
+      </p:sp>
+      <p:sp>
+        <p:nvSpPr>
+          <p:cNvPr id="30" name="Shape 28"/>
+          <p:cNvSpPr/>
+          <p:nvPr/>
+        </p:nvSpPr>
+        <p:spPr>
+          <a:xfrm>
+            <a:off x="457200" y="3529584"/>
+            <a:ext cx="8229600" cy="685800"/>
+          </a:xfrm>
+          <a:prstGeom prst="rect">
+            <a:avLst/>
+          </a:prstGeom>
+          <a:solidFill>
+            <a:srgbClr val="F1F5F9"/>
+          </a:solidFill>
+          <a:ln w="12700">
+            <a:solidFill>
+              <a:srgbClr val="E2E8F0"/>
+            </a:solidFill>
+            <a:prstDash val="solid"/>
+          </a:ln>
+        </p:spPr>
+      </p:sp>
+      <p:sp>
+        <p:nvSpPr>
+          <p:cNvPr id="31" name="Shape 29"/>
+          <p:cNvSpPr/>
+          <p:nvPr/>
+        </p:nvSpPr>
+        <p:spPr>
+          <a:xfrm>
+            <a:off x="457200" y="3529584"/>
+            <a:ext cx="54864" cy="685800"/>
+          </a:xfrm>
+          <a:prstGeom prst="rect">
+            <a:avLst/>
+          </a:prstGeom>
+          <a:solidFill>
+            <a:srgbClr val="DC2626"/>
+          </a:solidFill>
+          <a:ln w="12700">
+            <a:solidFill>
+              <a:srgbClr val="DC2626"/>
+            </a:solidFill>
+            <a:prstDash val="solid"/>
+          </a:ln>
+        </p:spPr>
+      </p:sp>
+      <p:sp>
+        <p:nvSpPr>
+          <p:cNvPr id="32" name="Text 30"/>
+          <p:cNvSpPr/>
+          <p:nvPr/>
+        </p:nvSpPr>
+        <p:spPr>
+          <a:xfrm>
+            <a:off x="566928" y="3575304"/>
+            <a:ext cx="1051560" cy="256032"/>
+          </a:xfrm>
+          <a:prstGeom prst="rect">
+            <a:avLst/>
+          </a:prstGeom>
+          <a:noFill/>
+          <a:ln/>
+        </p:spPr>
+        <p:txBody>
+          <a:bodyPr wrap="square" lIns="0" tIns="0" rIns="0" bIns="0" rtlCol="0" anchor="ctr"/>
+          <a:lstStyle/>
+          <a:p>
+            <a:pPr algn="l" indent="0" marL="0">
+              <a:buNone/>
+            </a:pPr>
+            <a:r>
+              <a:rPr lang="en-US" sz="1100" b="1" dirty="0">
+                <a:solidFill>
+                  <a:srgbClr val="DC2626"/>
+                </a:solidFill>
+              </a:rPr>
+              <a:t>TC-04</a:t>
+            </a:r>
+            <a:endParaRPr lang="en-US" sz="1100" dirty="0"/>
+          </a:p>
+        </p:txBody>
+      </p:sp>
+      <p:sp>
+        <p:nvSpPr>
+          <p:cNvPr id="33" name="Text 31"/>
+          <p:cNvSpPr/>
+          <p:nvPr/>
+        </p:nvSpPr>
+        <p:spPr>
+          <a:xfrm>
+            <a:off x="566928" y="3877056"/>
+            <a:ext cx="1051560" cy="228600"/>
+          </a:xfrm>
+          <a:prstGeom prst="rect">
+            <a:avLst/>
+          </a:prstGeom>
+          <a:noFill/>
+          <a:ln/>
+        </p:spPr>
+        <p:txBody>
+          <a:bodyPr wrap="square" lIns="0" tIns="0" rIns="0" bIns="0" rtlCol="0" anchor="ctr"/>
+          <a:lstStyle/>
+          <a:p>
+            <a:pPr algn="l" indent="0" marL="0">
+              <a:buNone/>
+            </a:pPr>
+            <a:r>
+              <a:rPr lang="en-US" sz="900" dirty="0">
+                <a:solidFill>
+                  <a:srgbClr val="475569"/>
+                </a:solidFill>
+              </a:rPr>
+              <a:t>Fall / Critical</a:t>
+            </a:r>
+            <a:endParaRPr lang="en-US" sz="900" dirty="0"/>
+          </a:p>
+        </p:txBody>
+      </p:sp>
+      <p:sp>
+        <p:nvSpPr>
+          <p:cNvPr id="34" name="Text 32"/>
+          <p:cNvSpPr/>
+          <p:nvPr/>
+        </p:nvSpPr>
+        <p:spPr>
+          <a:xfrm>
+            <a:off x="1737360" y="3621024"/>
+            <a:ext cx="2834640" cy="548640"/>
+          </a:xfrm>
+          <a:prstGeom prst="rect">
+            <a:avLst/>
+          </a:prstGeom>
+          <a:noFill/>
+          <a:ln/>
+        </p:spPr>
+        <p:txBody>
+          <a:bodyPr wrap="square" lIns="0" tIns="0" rIns="0" bIns="0" rtlCol="0" anchor="ctr"/>
+          <a:lstStyle/>
+          <a:p>
+            <a:pPr algn="l" indent="0" marL="0">
+              <a:buNone/>
+            </a:pPr>
+            <a:r>
+              <a:rPr lang="en-US" sz="1000" dirty="0">
+                <a:solidFill>
+                  <a:srgbClr val="0F172A"/>
+                </a:solidFill>
+              </a:rPr>
+              <a:t>Temp=36, HR=75, Accel=110, Timer=0</a:t>
+            </a:r>
+            <a:endParaRPr lang="en-US" sz="1000" dirty="0"/>
+          </a:p>
+        </p:txBody>
+      </p:sp>
+      <p:sp>
+        <p:nvSpPr>
+          <p:cNvPr id="35" name="Text 33"/>
+          <p:cNvSpPr/>
+          <p:nvPr/>
+        </p:nvSpPr>
+        <p:spPr>
+          <a:xfrm>
+            <a:off x="4663440" y="3621024"/>
+            <a:ext cx="3291840" cy="548640"/>
+          </a:xfrm>
+          <a:prstGeom prst="rect">
+            <a:avLst/>
+          </a:prstGeom>
+          <a:noFill/>
+          <a:ln/>
+        </p:spPr>
+        <p:txBody>
+          <a:bodyPr wrap="square" lIns="0" tIns="0" rIns="0" bIns="0" rtlCol="0" anchor="ctr"/>
+          <a:lstStyle/>
+          <a:p>
+            <a:pPr algn="l" indent="0" marL="0">
+              <a:buNone/>
+            </a:pPr>
+            <a:r>
+              <a:rPr lang="en-US" sz="1000" dirty="0">
+                <a:solidFill>
+                  <a:srgbClr val="475569"/>
+                </a:solidFill>
+              </a:rPr>
+              <a:t>[Status: CRITICAL] — GPS SOS + exit code 10</a:t>
+            </a:r>
+            <a:endParaRPr lang="en-US" sz="1000" dirty="0"/>
+          </a:p>
+        </p:txBody>
+      </p:sp>
+      <p:sp>
+        <p:nvSpPr>
+          <p:cNvPr id="36" name="Text 34"/>
+          <p:cNvSpPr/>
+          <p:nvPr/>
+        </p:nvSpPr>
+        <p:spPr>
+          <a:xfrm>
+            <a:off x="8183880" y="3730752"/>
+            <a:ext cx="548640" cy="274320"/>
+          </a:xfrm>
+          <a:prstGeom prst="rect">
+            <a:avLst/>
+          </a:prstGeom>
+          <a:noFill/>
+          <a:ln/>
+        </p:spPr>
+        <p:txBody>
+          <a:bodyPr wrap="square" lIns="0" tIns="0" rIns="0" bIns="0" rtlCol="0" anchor="ctr"/>
+          <a:lstStyle/>
+          <a:p>
+            <a:pPr algn="ctr" indent="0" marL="0">
+              <a:buNone/>
+            </a:pPr>
+            <a:r>
+              <a:rPr lang="en-US" sz="1000" b="1" dirty="0">
+                <a:solidFill>
+                  <a:srgbClr val="16A34A"/>
+                </a:solidFill>
+              </a:rPr>
+              <a:t>PASS</a:t>
+            </a:r>
+            <a:endParaRPr lang="en-US" sz="1000" dirty="0"/>
+          </a:p>
+        </p:txBody>
+      </p:sp>
+      <p:sp>
+        <p:nvSpPr>
+          <p:cNvPr id="37" name="Shape 35"/>
+          <p:cNvSpPr/>
+          <p:nvPr/>
+        </p:nvSpPr>
+        <p:spPr>
+          <a:xfrm>
+            <a:off x="457200" y="4279392"/>
+            <a:ext cx="8229600" cy="685800"/>
+          </a:xfrm>
+          <a:prstGeom prst="rect">
+            <a:avLst/>
+          </a:prstGeom>
+          <a:solidFill>
+            <a:srgbClr val="FFFFFF"/>
+          </a:solidFill>
+          <a:ln w="12700">
+            <a:solidFill>
+              <a:srgbClr val="E2E8F0"/>
+            </a:solidFill>
+            <a:prstDash val="solid"/>
+          </a:ln>
+        </p:spPr>
+      </p:sp>
+      <p:sp>
+        <p:nvSpPr>
+          <p:cNvPr id="38" name="Shape 36"/>
+          <p:cNvSpPr/>
+          <p:nvPr/>
+        </p:nvSpPr>
+        <p:spPr>
+          <a:xfrm>
+            <a:off x="457200" y="4279392"/>
+            <a:ext cx="54864" cy="685800"/>
+          </a:xfrm>
+          <a:prstGeom prst="rect">
+            <a:avLst/>
+          </a:prstGeom>
+          <a:solidFill>
+            <a:srgbClr val="2563EB"/>
+          </a:solidFill>
+          <a:ln w="12700">
+            <a:solidFill>
+              <a:srgbClr val="2563EB"/>
+            </a:solidFill>
+            <a:prstDash val="solid"/>
+          </a:ln>
+        </p:spPr>
+      </p:sp>
+      <p:sp>
+        <p:nvSpPr>
+          <p:cNvPr id="39" name="Text 37"/>
+          <p:cNvSpPr/>
+          <p:nvPr/>
+        </p:nvSpPr>
+        <p:spPr>
+          <a:xfrm>
+            <a:off x="566928" y="4325112"/>
+            <a:ext cx="1051560" cy="256032"/>
+          </a:xfrm>
+          <a:prstGeom prst="rect">
+            <a:avLst/>
+          </a:prstGeom>
+          <a:noFill/>
+          <a:ln/>
+        </p:spPr>
+        <p:txBody>
+          <a:bodyPr wrap="square" lIns="0" tIns="0" rIns="0" bIns="0" rtlCol="0" anchor="ctr"/>
+          <a:lstStyle/>
+          <a:p>
+            <a:pPr algn="l" indent="0" marL="0">
+              <a:buNone/>
+            </a:pPr>
+            <a:r>
+              <a:rPr lang="en-US" sz="1100" b="1" dirty="0">
+                <a:solidFill>
+                  <a:srgbClr val="2563EB"/>
+                </a:solidFill>
+              </a:rPr>
+              <a:t>TC-05</a:t>
+            </a:r>
+            <a:endParaRPr lang="en-US" sz="1100" dirty="0"/>
+          </a:p>
+        </p:txBody>
+      </p:sp>
+      <p:sp>
+        <p:nvSpPr>
+          <p:cNvPr id="40" name="Text 38"/>
+          <p:cNvSpPr/>
+          <p:nvPr/>
+        </p:nvSpPr>
+        <p:spPr>
+          <a:xfrm>
+            <a:off x="566928" y="4626864"/>
+            <a:ext cx="1051560" cy="228600"/>
+          </a:xfrm>
+          <a:prstGeom prst="rect">
+            <a:avLst/>
+          </a:prstGeom>
+          <a:noFill/>
+          <a:ln/>
+        </p:spPr>
+        <p:txBody>
+          <a:bodyPr wrap="square" lIns="0" tIns="0" rIns="0" bIns="0" rtlCol="0" anchor="ctr"/>
+          <a:lstStyle/>
+          <a:p>
+            <a:pPr algn="l" indent="0" marL="0">
+              <a:buNone/>
+            </a:pPr>
+            <a:r>
+              <a:rPr lang="en-US" sz="900" dirty="0">
+                <a:solidFill>
+                  <a:srgbClr val="475569"/>
+                </a:solidFill>
+              </a:rPr>
+              <a:t>Input Validation</a:t>
+            </a:r>
+            <a:endParaRPr lang="en-US" sz="900" dirty="0"/>
+          </a:p>
+        </p:txBody>
+      </p:sp>
+      <p:sp>
+        <p:nvSpPr>
+          <p:cNvPr id="41" name="Text 39"/>
+          <p:cNvSpPr/>
+          <p:nvPr/>
+        </p:nvSpPr>
+        <p:spPr>
+          <a:xfrm>
+            <a:off x="1737360" y="4370832"/>
+            <a:ext cx="2834640" cy="548640"/>
+          </a:xfrm>
+          <a:prstGeom prst="rect">
+            <a:avLst/>
+          </a:prstGeom>
+          <a:noFill/>
+          <a:ln/>
+        </p:spPr>
+        <p:txBody>
+          <a:bodyPr wrap="square" lIns="0" tIns="0" rIns="0" bIns="0" rtlCol="0" anchor="ctr"/>
+          <a:lstStyle/>
+          <a:p>
+            <a:pPr algn="l" indent="0" marL="0">
+              <a:buNone/>
+            </a:pPr>
+            <a:r>
+              <a:rPr lang="en-US" sz="1000" dirty="0">
+                <a:solidFill>
+                  <a:srgbClr val="0F172A"/>
+                </a:solidFill>
+              </a:rPr>
+              <a:t>Temp=120 (invalid) → retry with 37</a:t>
+            </a:r>
+            <a:endParaRPr lang="en-US" sz="1000" dirty="0"/>
+          </a:p>
+        </p:txBody>
+      </p:sp>
+      <p:sp>
+        <p:nvSpPr>
+          <p:cNvPr id="42" name="Text 40"/>
+          <p:cNvSpPr/>
+          <p:nvPr/>
+        </p:nvSpPr>
+        <p:spPr>
+          <a:xfrm>
+            <a:off x="4663440" y="4370832"/>
+            <a:ext cx="3291840" cy="548640"/>
+          </a:xfrm>
+          <a:prstGeom prst="rect">
+            <a:avLst/>
+          </a:prstGeom>
+          <a:noFill/>
+          <a:ln/>
+        </p:spPr>
+        <p:txBody>
+          <a:bodyPr wrap="square" lIns="0" tIns="0" rIns="0" bIns="0" rtlCol="0" anchor="ctr"/>
+          <a:lstStyle/>
+          <a:p>
+            <a:pPr algn="l" indent="0" marL="0">
+              <a:buNone/>
+            </a:pPr>
+            <a:r>
+              <a:rPr lang="en-US" sz="1000" dirty="0">
+                <a:solidFill>
+                  <a:srgbClr val="475569"/>
+                </a:solidFill>
+              </a:rPr>
+              <a:t>[ERROR] message + re-prompt, then normal flow</a:t>
+            </a:r>
+            <a:endParaRPr lang="en-US" sz="1000" dirty="0"/>
+          </a:p>
+        </p:txBody>
+      </p:sp>
+      <p:sp>
+        <p:nvSpPr>
+          <p:cNvPr id="43" name="Text 41"/>
+          <p:cNvSpPr/>
+          <p:nvPr/>
+        </p:nvSpPr>
+        <p:spPr>
+          <a:xfrm>
+            <a:off x="8183880" y="4480560"/>
+            <a:ext cx="548640" cy="274320"/>
+          </a:xfrm>
+          <a:prstGeom prst="rect">
+            <a:avLst/>
+          </a:prstGeom>
+          <a:noFill/>
+          <a:ln/>
+        </p:spPr>
+        <p:txBody>
+          <a:bodyPr wrap="square" lIns="0" tIns="0" rIns="0" bIns="0" rtlCol="0" anchor="ctr"/>
+          <a:lstStyle/>
+          <a:p>
+            <a:pPr algn="ctr" indent="0" marL="0">
+              <a:buNone/>
+            </a:pPr>
+            <a:r>
+              <a:rPr lang="en-US" sz="1000" b="1" dirty="0">
+                <a:solidFill>
+                  <a:srgbClr val="16A34A"/>
+                </a:solidFill>
+              </a:rPr>
+              <a:t>PASS</a:t>
+            </a:r>
+            <a:endParaRPr lang="en-US" sz="1000" dirty="0"/>
+          </a:p>
+        </p:txBody>
+      </p:sp>
+    </p:spTree>
+  </p:cSld>
+  <p:clrMapOvr>
+    <a:masterClrMapping/>
+  </p:clrMapOvr>
+</p:sld>
+</file>
+
+<file path=ppt/slides/slide8.xml><?xml version="1.0" encoding="utf-8"?>
+<p:sld xmlns:a="http://schemas.openxmlformats.org/drawingml/2006/main" xmlns:r="http://schemas.openxmlformats.org/officeDocument/2006/relationships" xmlns:p="http://schemas.openxmlformats.org/presentationml/2006/main">
+  <p:cSld name="Slide 8">
+    <p:bg>
+      <p:bgPr>
+        <a:solidFill>
+          <a:srgbClr val="F8FAFC"/>
+        </a:solidFill>
+      </p:bgPr>
+    </p:bg>
+    <p:spTree>
+      <p:nvGrpSpPr>
+        <p:cNvPr id="1" name=""/>
+        <p:cNvGrpSpPr/>
+        <p:nvPr/>
+      </p:nvGrpSpPr>
+      <p:grpSpPr>
+        <a:xfrm>
+          <a:off x="0" y="0"/>
+          <a:ext cx="0" cy="0"/>
+          <a:chOff x="0" y="0"/>
+          <a:chExt cx="0" cy="0"/>
+        </a:xfrm>
+      </p:grpSpPr>
+      <p:sp>
+        <p:nvSpPr>
+          <p:cNvPr id="2" name="Text 0"/>
+          <p:cNvSpPr/>
+          <p:nvPr/>
+        </p:nvSpPr>
+        <p:spPr>
+          <a:xfrm>
+            <a:off x="457200" y="182880"/>
+            <a:ext cx="8229600" cy="502920"/>
+          </a:xfrm>
+          <a:prstGeom prst="rect">
+            <a:avLst/>
+          </a:prstGeom>
+          <a:noFill/>
+          <a:ln/>
+        </p:spPr>
+        <p:txBody>
+          <a:bodyPr wrap="square" lIns="0" tIns="0" rIns="0" bIns="0" rtlCol="0" anchor="ctr"/>
+          <a:lstStyle/>
+          <a:p>
+            <a:pPr algn="l" indent="0" marL="0">
+              <a:buNone/>
+            </a:pPr>
+            <a:r>
+              <a:rPr lang="en-US" sz="3000" b="1" dirty="0">
+                <a:solidFill>
+                  <a:srgbClr val="0F172A"/>
+                </a:solidFill>
+                <a:latin typeface="Arial Black" pitchFamily="34" charset="0"/>
+                <a:ea typeface="Arial Black" pitchFamily="34" charset="-122"/>
+                <a:cs typeface="Arial Black" pitchFamily="34" charset="-120"/>
+              </a:rPr>
+              <a:t>Work Distribution</a:t>
+            </a:r>
+            <a:endParaRPr lang="en-US" sz="3000" dirty="0"/>
+          </a:p>
+        </p:txBody>
+      </p:sp>
+      <p:sp>
+        <p:nvSpPr>
+          <p:cNvPr id="3" name="Shape 1"/>
+          <p:cNvSpPr/>
+          <p:nvPr/>
+        </p:nvSpPr>
+        <p:spPr>
+          <a:xfrm>
+            <a:off x="457200" y="713232"/>
+            <a:ext cx="8229600" cy="27432"/>
+          </a:xfrm>
+          <a:prstGeom prst="rect">
+            <a:avLst/>
+          </a:prstGeom>
+          <a:solidFill>
+            <a:srgbClr val="0EA5E9"/>
+          </a:solidFill>
+          <a:ln w="12700">
+            <a:solidFill>
+              <a:srgbClr val="0EA5E9"/>
+            </a:solidFill>
+            <a:prstDash val="solid"/>
+          </a:ln>
+        </p:spPr>
+      </p:sp>
+      <p:sp>
+        <p:nvSpPr>
+          <p:cNvPr id="4" name="Shape 2"/>
+          <p:cNvSpPr/>
+          <p:nvPr/>
+        </p:nvSpPr>
+        <p:spPr>
+          <a:xfrm>
+            <a:off x="457200" y="868680"/>
+            <a:ext cx="3931920" cy="1737360"/>
+          </a:xfrm>
+          <a:prstGeom prst="rect">
+            <a:avLst/>
+          </a:prstGeom>
+          <a:solidFill>
+            <a:srgbClr val="FFFFFF"/>
+          </a:solidFill>
+          <a:ln w="12700">
+            <a:solidFill>
+              <a:srgbClr val="E2E8F0"/>
+            </a:solidFill>
+            <a:prstDash val="solid"/>
+          </a:ln>
+          <a:effectLst>
+            <a:outerShdw sx="100000" sy="100000" kx="0" ky="0" algn="bl" rotWithShape="0" blurRad="76200" dist="25400" dir="8100000">
+              <a:srgbClr val="000000">
+                <a:alpha val="7000"/>
+              </a:srgbClr>
+            </a:outerShdw>
+          </a:effectLst>
+        </p:spPr>
+      </p:sp>
+      <p:sp>
+        <p:nvSpPr>
+          <p:cNvPr id="5" name="Shape 3"/>
+          <p:cNvSpPr/>
+          <p:nvPr/>
+        </p:nvSpPr>
+        <p:spPr>
+          <a:xfrm>
+            <a:off x="457200" y="868680"/>
+            <a:ext cx="3931920" cy="347472"/>
+          </a:xfrm>
+          <a:prstGeom prst="rect">
+            <a:avLst/>
+          </a:prstGeom>
+          <a:solidFill>
+            <a:srgbClr val="0EA5E9"/>
+          </a:solidFill>
+          <a:ln w="12700">
+            <a:solidFill>
+              <a:srgbClr val="0EA5E9"/>
+            </a:solidFill>
+            <a:prstDash val="solid"/>
+          </a:ln>
+        </p:spPr>
+      </p:sp>
+      <p:sp>
+        <p:nvSpPr>
+          <p:cNvPr id="6" name="Text 4"/>
+          <p:cNvSpPr/>
+          <p:nvPr/>
+        </p:nvSpPr>
+        <p:spPr>
+          <a:xfrm>
+            <a:off x="566928" y="923544"/>
+            <a:ext cx="3749040" cy="256032"/>
+          </a:xfrm>
+          <a:prstGeom prst="rect">
+            <a:avLst/>
+          </a:prstGeom>
+          <a:noFill/>
+          <a:ln/>
+        </p:spPr>
+        <p:txBody>
+          <a:bodyPr wrap="square" lIns="0" tIns="0" rIns="0" bIns="0" rtlCol="0" anchor="ctr"/>
+          <a:lstStyle/>
+          <a:p>
+            <a:pPr algn="l" indent="0" marL="0">
+              <a:buNone/>
+            </a:pPr>
+            <a:r>
+              <a:rPr lang="en-US" sz="1100" b="1" dirty="0">
+                <a:solidFill>
+                  <a:srgbClr val="FFFFFF"/>
+                </a:solidFill>
+              </a:rPr>
+              <a:t>Adam Fawwaz Bin Sazalizam</a:t>
+            </a:r>
+            <a:endParaRPr lang="en-US" sz="1100" dirty="0"/>
+          </a:p>
+        </p:txBody>
+      </p:sp>
+      <p:sp>
+        <p:nvSpPr>
+          <p:cNvPr id="7" name="Text 5"/>
+          <p:cNvSpPr/>
+          <p:nvPr/>
+        </p:nvSpPr>
+        <p:spPr>
+          <a:xfrm>
+            <a:off x="566928" y="1271016"/>
+            <a:ext cx="3749040" cy="228600"/>
+          </a:xfrm>
+          <a:prstGeom prst="rect">
+            <a:avLst/>
+          </a:prstGeom>
+          <a:noFill/>
+          <a:ln/>
+        </p:spPr>
+        <p:txBody>
+          <a:bodyPr wrap="square" lIns="0" tIns="0" rIns="0" bIns="0" rtlCol="0" anchor="ctr"/>
+          <a:lstStyle/>
+          <a:p>
+            <a:pPr algn="l" indent="0" marL="0">
+              <a:buNone/>
+            </a:pPr>
+            <a:r>
+              <a:rPr lang="en-US" sz="1000" b="1" dirty="0">
+                <a:solidFill>
+                  <a:srgbClr val="0EA5E9"/>
+                </a:solidFill>
+              </a:rPr>
+              <a:t>2416969  |  Group Leader</a:t>
+            </a:r>
+            <a:endParaRPr lang="en-US" sz="1000" dirty="0"/>
+          </a:p>
+        </p:txBody>
+      </p:sp>
+      <p:sp>
+        <p:nvSpPr>
+          <p:cNvPr id="8" name="Text 6"/>
+          <p:cNvSpPr/>
+          <p:nvPr/>
+        </p:nvSpPr>
+        <p:spPr>
+          <a:xfrm>
+            <a:off x="566928" y="1527048"/>
+            <a:ext cx="3749040" cy="1005840"/>
+          </a:xfrm>
+          <a:prstGeom prst="rect">
+            <a:avLst/>
+          </a:prstGeom>
+          <a:noFill/>
+          <a:ln/>
+        </p:spPr>
+        <p:txBody>
+          <a:bodyPr wrap="square" lIns="0" tIns="0" rIns="0" bIns="0" rtlCol="0" anchor="ctr"/>
+          <a:lstStyle/>
+          <a:p>
+            <a:pPr algn="l" indent="0" marL="0">
+              <a:buNone/>
+            </a:pPr>
+            <a:r>
+              <a:rPr lang="en-US" sz="1000" dirty="0">
+                <a:solidFill>
+                  <a:srgbClr val="475569"/>
+                </a:solidFill>
+              </a:rPr>
+              <a:t>Project coordination · Flowchart design · Body Temperature sensor module · Final integration</a:t>
+            </a:r>
+            <a:endParaRPr lang="en-US" sz="1000" dirty="0"/>
+          </a:p>
+        </p:txBody>
+      </p:sp>
+      <p:sp>
+        <p:nvSpPr>
+          <p:cNvPr id="9" name="Shape 7"/>
+          <p:cNvSpPr/>
+          <p:nvPr/>
+        </p:nvSpPr>
+        <p:spPr>
+          <a:xfrm>
+            <a:off x="4572000" y="868680"/>
+            <a:ext cx="3931920" cy="1737360"/>
+          </a:xfrm>
+          <a:prstGeom prst="rect">
+            <a:avLst/>
+          </a:prstGeom>
+          <a:solidFill>
+            <a:srgbClr val="FFFFFF"/>
+          </a:solidFill>
+          <a:ln w="12700">
+            <a:solidFill>
+              <a:srgbClr val="E2E8F0"/>
+            </a:solidFill>
+            <a:prstDash val="solid"/>
+          </a:ln>
+          <a:effectLst>
+            <a:outerShdw sx="100000" sy="100000" kx="0" ky="0" algn="bl" rotWithShape="0" blurRad="76200" dist="25400" dir="8100000">
+              <a:srgbClr val="000000">
+                <a:alpha val="7000"/>
+              </a:srgbClr>
+            </a:outerShdw>
+          </a:effectLst>
+        </p:spPr>
+      </p:sp>
+      <p:sp>
+        <p:nvSpPr>
+          <p:cNvPr id="10" name="Shape 8"/>
+          <p:cNvSpPr/>
+          <p:nvPr/>
+        </p:nvSpPr>
+        <p:spPr>
+          <a:xfrm>
+            <a:off x="4572000" y="868680"/>
+            <a:ext cx="3931920" cy="347472"/>
+          </a:xfrm>
+          <a:prstGeom prst="rect">
+            <a:avLst/>
+          </a:prstGeom>
+          <a:solidFill>
+            <a:srgbClr val="2563EB"/>
+          </a:solidFill>
+          <a:ln w="12700">
+            <a:solidFill>
+              <a:srgbClr val="2563EB"/>
+            </a:solidFill>
+            <a:prstDash val="solid"/>
+          </a:ln>
+        </p:spPr>
+      </p:sp>
+      <p:sp>
+        <p:nvSpPr>
+          <p:cNvPr id="11" name="Text 9"/>
+          <p:cNvSpPr/>
+          <p:nvPr/>
+        </p:nvSpPr>
+        <p:spPr>
+          <a:xfrm>
+            <a:off x="4681728" y="923544"/>
+            <a:ext cx="3749040" cy="256032"/>
+          </a:xfrm>
+          <a:prstGeom prst="rect">
+            <a:avLst/>
+          </a:prstGeom>
+          <a:noFill/>
+          <a:ln/>
+        </p:spPr>
+        <p:txBody>
+          <a:bodyPr wrap="square" lIns="0" tIns="0" rIns="0" bIns="0" rtlCol="0" anchor="ctr"/>
+          <a:lstStyle/>
+          <a:p>
+            <a:pPr algn="l" indent="0" marL="0">
+              <a:buNone/>
+            </a:pPr>
+            <a:r>
+              <a:rPr lang="en-US" sz="1100" b="1" dirty="0">
+                <a:solidFill>
+                  <a:srgbClr val="FFFFFF"/>
+                </a:solidFill>
+              </a:rPr>
+              <a:t>Ahmad Fawwaz Bin Abdul Kadir</a:t>
+            </a:r>
+            <a:endParaRPr lang="en-US" sz="1100" dirty="0"/>
+          </a:p>
+        </p:txBody>
+      </p:sp>
+      <p:sp>
+        <p:nvSpPr>
+          <p:cNvPr id="12" name="Text 10"/>
+          <p:cNvSpPr/>
+          <p:nvPr/>
+        </p:nvSpPr>
+        <p:spPr>
+          <a:xfrm>
+            <a:off x="4681728" y="1271016"/>
+            <a:ext cx="3749040" cy="228600"/>
+          </a:xfrm>
+          <a:prstGeom prst="rect">
+            <a:avLst/>
+          </a:prstGeom>
+          <a:noFill/>
+          <a:ln/>
+        </p:spPr>
+        <p:txBody>
+          <a:bodyPr wrap="square" lIns="0" tIns="0" rIns="0" bIns="0" rtlCol="0" anchor="ctr"/>
+          <a:lstStyle/>
+          <a:p>
+            <a:pPr algn="l" indent="0" marL="0">
+              <a:buNone/>
+            </a:pPr>
+            <a:r>
+              <a:rPr lang="en-US" sz="1000" b="1" dirty="0">
+                <a:solidFill>
+                  <a:srgbClr val="2563EB"/>
+                </a:solidFill>
+              </a:rPr>
+              <a:t>2418497</a:t>
+            </a:r>
+            <a:endParaRPr lang="en-US" sz="1000" dirty="0"/>
+          </a:p>
+        </p:txBody>
+      </p:sp>
+      <p:sp>
+        <p:nvSpPr>
+          <p:cNvPr id="13" name="Text 11"/>
+          <p:cNvSpPr/>
+          <p:nvPr/>
+        </p:nvSpPr>
+        <p:spPr>
+          <a:xfrm>
+            <a:off x="4681728" y="1527048"/>
+            <a:ext cx="3749040" cy="1005840"/>
+          </a:xfrm>
+          <a:prstGeom prst="rect">
+            <a:avLst/>
+          </a:prstGeom>
+          <a:noFill/>
+          <a:ln/>
+        </p:spPr>
+        <p:txBody>
+          <a:bodyPr wrap="square" lIns="0" tIns="0" rIns="0" bIns="0" rtlCol="0" anchor="ctr"/>
+          <a:lstStyle/>
+          <a:p>
+            <a:pPr algn="l" indent="0" marL="0">
+              <a:buNone/>
+            </a:pPr>
+            <a:r>
+              <a:rPr lang="en-US" sz="1000" dirty="0">
+                <a:solidFill>
+                  <a:srgbClr val="475569"/>
+                </a:solidFill>
+              </a:rPr>
+              <a:t>Use case diagram · Pulse Rate sensor module · Heat Stress Index decision logic · Unit testing</a:t>
+            </a:r>
+            <a:endParaRPr lang="en-US" sz="1000" dirty="0"/>
+          </a:p>
+        </p:txBody>
+      </p:sp>
+      <p:sp>
+        <p:nvSpPr>
+          <p:cNvPr id="14" name="Shape 12"/>
+          <p:cNvSpPr/>
+          <p:nvPr/>
+        </p:nvSpPr>
+        <p:spPr>
+          <a:xfrm>
+            <a:off x="457200" y="2770632"/>
+            <a:ext cx="3931920" cy="1737360"/>
+          </a:xfrm>
+          <a:prstGeom prst="rect">
+            <a:avLst/>
+          </a:prstGeom>
+          <a:solidFill>
+            <a:srgbClr val="FFFFFF"/>
+          </a:solidFill>
+          <a:ln w="12700">
+            <a:solidFill>
+              <a:srgbClr val="E2E8F0"/>
+            </a:solidFill>
+            <a:prstDash val="solid"/>
+          </a:ln>
+          <a:effectLst>
+            <a:outerShdw sx="100000" sy="100000" kx="0" ky="0" algn="bl" rotWithShape="0" blurRad="76200" dist="25400" dir="8100000">
+              <a:srgbClr val="000000">
+                <a:alpha val="7000"/>
+              </a:srgbClr>
+            </a:outerShdw>
+          </a:effectLst>
+        </p:spPr>
+      </p:sp>
+      <p:sp>
+        <p:nvSpPr>
+          <p:cNvPr id="15" name="Shape 13"/>
+          <p:cNvSpPr/>
+          <p:nvPr/>
+        </p:nvSpPr>
+        <p:spPr>
+          <a:xfrm>
+            <a:off x="457200" y="2770632"/>
+            <a:ext cx="3931920" cy="347472"/>
+          </a:xfrm>
+          <a:prstGeom prst="rect">
+            <a:avLst/>
+          </a:prstGeom>
+          <a:solidFill>
+            <a:srgbClr val="EA580C"/>
+          </a:solidFill>
+          <a:ln w="12700">
+            <a:solidFill>
+              <a:srgbClr val="EA580C"/>
+            </a:solidFill>
+            <a:prstDash val="solid"/>
+          </a:ln>
+        </p:spPr>
+      </p:sp>
+      <p:sp>
+        <p:nvSpPr>
+          <p:cNvPr id="16" name="Text 14"/>
+          <p:cNvSpPr/>
+          <p:nvPr/>
+        </p:nvSpPr>
+        <p:spPr>
+          <a:xfrm>
+            <a:off x="566928" y="2825496"/>
+            <a:ext cx="3749040" cy="256032"/>
+          </a:xfrm>
+          <a:prstGeom prst="rect">
+            <a:avLst/>
+          </a:prstGeom>
+          <a:noFill/>
+          <a:ln/>
+        </p:spPr>
+        <p:txBody>
+          <a:bodyPr wrap="square" lIns="0" tIns="0" rIns="0" bIns="0" rtlCol="0" anchor="ctr"/>
+          <a:lstStyle/>
+          <a:p>
+            <a:pPr algn="l" indent="0" marL="0">
+              <a:buNone/>
+            </a:pPr>
+            <a:r>
+              <a:rPr lang="en-US" sz="1100" b="1" dirty="0">
+                <a:solidFill>
+                  <a:srgbClr val="FFFFFF"/>
+                </a:solidFill>
+              </a:rPr>
+              <a:t>Wan Abdullah Mikhaiel Bin Wan Shamsuddin</a:t>
+            </a:r>
+            <a:endParaRPr lang="en-US" sz="1100" dirty="0"/>
+          </a:p>
+        </p:txBody>
+      </p:sp>
+      <p:sp>
+        <p:nvSpPr>
+          <p:cNvPr id="17" name="Text 15"/>
+          <p:cNvSpPr/>
+          <p:nvPr/>
+        </p:nvSpPr>
+        <p:spPr>
+          <a:xfrm>
+            <a:off x="566928" y="3172968"/>
+            <a:ext cx="3749040" cy="228600"/>
+          </a:xfrm>
+          <a:prstGeom prst="rect">
+            <a:avLst/>
+          </a:prstGeom>
+          <a:noFill/>
+          <a:ln/>
+        </p:spPr>
+        <p:txBody>
+          <a:bodyPr wrap="square" lIns="0" tIns="0" rIns="0" bIns="0" rtlCol="0" anchor="ctr"/>
+          <a:lstStyle/>
+          <a:p>
+            <a:pPr algn="l" indent="0" marL="0">
+              <a:buNone/>
+            </a:pPr>
+            <a:r>
+              <a:rPr lang="en-US" sz="1000" b="1" dirty="0">
+                <a:solidFill>
+                  <a:srgbClr val="EA580C"/>
+                </a:solidFill>
+              </a:rPr>
+              <a:t>2416229</a:t>
+            </a:r>
+            <a:endParaRPr lang="en-US" sz="1000" dirty="0"/>
+          </a:p>
+        </p:txBody>
+      </p:sp>
+      <p:sp>
+        <p:nvSpPr>
+          <p:cNvPr id="18" name="Text 16"/>
+          <p:cNvSpPr/>
+          <p:nvPr/>
+        </p:nvSpPr>
+        <p:spPr>
+          <a:xfrm>
+            <a:off x="566928" y="3429000"/>
+            <a:ext cx="3749040" cy="1005840"/>
+          </a:xfrm>
+          <a:prstGeom prst="rect">
+            <a:avLst/>
+          </a:prstGeom>
+          <a:noFill/>
+          <a:ln/>
+        </p:spPr>
+        <p:txBody>
+          <a:bodyPr wrap="square" lIns="0" tIns="0" rIns="0" bIns="0" rtlCol="0" anchor="ctr"/>
+          <a:lstStyle/>
+          <a:p>
+            <a:pPr algn="l" indent="0" marL="0">
+              <a:buNone/>
+            </a:pPr>
+            <a:r>
+              <a:rPr lang="en-US" sz="1000" dirty="0">
+                <a:solidFill>
+                  <a:srgbClr val="475569"/>
+                </a:solidFill>
+              </a:rPr>
+              <a:t>Hardware mapping table · Accelerometer sensor module · Fall detection logic · Decision &amp; control testing</a:t>
+            </a:r>
+            <a:endParaRPr lang="en-US" sz="1000" dirty="0"/>
+          </a:p>
+        </p:txBody>
+      </p:sp>
+      <p:sp>
+        <p:nvSpPr>
+          <p:cNvPr id="19" name="Shape 17"/>
+          <p:cNvSpPr/>
+          <p:nvPr/>
+        </p:nvSpPr>
+        <p:spPr>
+          <a:xfrm>
+            <a:off x="4572000" y="2770632"/>
+            <a:ext cx="3931920" cy="1737360"/>
+          </a:xfrm>
+          <a:prstGeom prst="rect">
+            <a:avLst/>
+          </a:prstGeom>
+          <a:solidFill>
+            <a:srgbClr val="FFFFFF"/>
+          </a:solidFill>
+          <a:ln w="12700">
+            <a:solidFill>
+              <a:srgbClr val="E2E8F0"/>
+            </a:solidFill>
+            <a:prstDash val="solid"/>
+          </a:ln>
+          <a:effectLst>
+            <a:outerShdw sx="100000" sy="100000" kx="0" ky="0" algn="bl" rotWithShape="0" blurRad="76200" dist="25400" dir="8100000">
+              <a:srgbClr val="000000">
+                <a:alpha val="7000"/>
+              </a:srgbClr>
+            </a:outerShdw>
+          </a:effectLst>
+        </p:spPr>
+      </p:sp>
+      <p:sp>
+        <p:nvSpPr>
+          <p:cNvPr id="20" name="Shape 18"/>
+          <p:cNvSpPr/>
+          <p:nvPr/>
+        </p:nvSpPr>
+        <p:spPr>
+          <a:xfrm>
+            <a:off x="4572000" y="2770632"/>
+            <a:ext cx="3931920" cy="347472"/>
+          </a:xfrm>
+          <a:prstGeom prst="rect">
+            <a:avLst/>
+          </a:prstGeom>
+          <a:solidFill>
+            <a:srgbClr val="16A34A"/>
+          </a:solidFill>
+          <a:ln w="12700">
+            <a:solidFill>
+              <a:srgbClr val="16A34A"/>
+            </a:solidFill>
+            <a:prstDash val="solid"/>
+          </a:ln>
+        </p:spPr>
+      </p:sp>
+      <p:sp>
+        <p:nvSpPr>
+          <p:cNvPr id="21" name="Text 19"/>
+          <p:cNvSpPr/>
+          <p:nvPr/>
+        </p:nvSpPr>
+        <p:spPr>
+          <a:xfrm>
+            <a:off x="4681728" y="2825496"/>
+            <a:ext cx="3749040" cy="256032"/>
+          </a:xfrm>
+          <a:prstGeom prst="rect">
+            <a:avLst/>
+          </a:prstGeom>
+          <a:noFill/>
+          <a:ln/>
+        </p:spPr>
+        <p:txBody>
+          <a:bodyPr wrap="square" lIns="0" tIns="0" rIns="0" bIns="0" rtlCol="0" anchor="ctr"/>
+          <a:lstStyle/>
+          <a:p>
+            <a:pPr algn="l" indent="0" marL="0">
+              <a:buNone/>
+            </a:pPr>
+            <a:r>
+              <a:rPr lang="en-US" sz="1100" b="1" dirty="0">
+                <a:solidFill>
+                  <a:srgbClr val="FFFFFF"/>
+                </a:solidFill>
+              </a:rPr>
+              <a:t>Alfyan Shawn Bin Jasni Shirlin</a:t>
+            </a:r>
+            <a:endParaRPr lang="en-US" sz="1100" dirty="0"/>
+          </a:p>
+        </p:txBody>
+      </p:sp>
+      <p:sp>
+        <p:nvSpPr>
+          <p:cNvPr id="22" name="Text 20"/>
+          <p:cNvSpPr/>
+          <p:nvPr/>
+        </p:nvSpPr>
+        <p:spPr>
+          <a:xfrm>
+            <a:off x="4681728" y="3172968"/>
+            <a:ext cx="3749040" cy="228600"/>
+          </a:xfrm>
+          <a:prstGeom prst="rect">
+            <a:avLst/>
+          </a:prstGeom>
+          <a:noFill/>
+          <a:ln/>
+        </p:spPr>
+        <p:txBody>
+          <a:bodyPr wrap="square" lIns="0" tIns="0" rIns="0" bIns="0" rtlCol="0" anchor="ctr"/>
+          <a:lstStyle/>
+          <a:p>
+            <a:pPr algn="l" indent="0" marL="0">
+              <a:buNone/>
+            </a:pPr>
+            <a:r>
+              <a:rPr lang="en-US" sz="1000" b="1" dirty="0">
+                <a:solidFill>
+                  <a:srgbClr val="16A34A"/>
+                </a:solidFill>
+              </a:rPr>
+              <a:t>2417841</a:t>
+            </a:r>
+            <a:endParaRPr lang="en-US" sz="1000" dirty="0"/>
+          </a:p>
+        </p:txBody>
+      </p:sp>
+      <p:sp>
+        <p:nvSpPr>
+          <p:cNvPr id="23" name="Text 21"/>
+          <p:cNvSpPr/>
+          <p:nvPr/>
+        </p:nvSpPr>
+        <p:spPr>
+          <a:xfrm>
+            <a:off x="4681728" y="3429000"/>
+            <a:ext cx="3749040" cy="1005840"/>
+          </a:xfrm>
+          <a:prstGeom prst="rect">
+            <a:avLst/>
+          </a:prstGeom>
+          <a:noFill/>
+          <a:ln/>
+        </p:spPr>
+        <p:txBody>
+          <a:bodyPr wrap="square" lIns="0" tIns="0" rIns="0" bIns="0" rtlCol="0" anchor="ctr"/>
+          <a:lstStyle/>
+          <a:p>
+            <a:pPr algn="l" indent="0" marL="0">
+              <a:buNone/>
+            </a:pPr>
+            <a:r>
+              <a:rPr lang="en-US" sz="1000" dirty="0">
+                <a:solidFill>
+                  <a:srgbClr val="475569"/>
+                </a:solidFill>
+              </a:rPr>
+              <a:t>Display &amp; status output module · Actuator subroutines (Haptic, LED, GPS) · Error handling · Code review</a:t>
+            </a:r>
+            <a:endParaRPr lang="en-US" sz="1000" dirty="0"/>
+          </a:p>
+        </p:txBody>
+      </p:sp>
+    </p:spTree>
+  </p:cSld>
+  <p:clrMapOvr>
+    <a:masterClrMapping/>
+  </p:clrMapOvr>
+</p:sld>
+</file>
+
+<file path=ppt/slides/slide9.xml><?xml version="1.0" encoding="utf-8"?>
+<p:sld xmlns:a="http://schemas.openxmlformats.org/drawingml/2006/main" xmlns:r="http://schemas.openxmlformats.org/officeDocument/2006/relationships" xmlns:p="http://schemas.openxmlformats.org/presentationml/2006/main">
+  <p:cSld name="Slide 9">
     <p:bg>
       <p:bgPr>
         <a:solidFill>
